--- a/docs/presentation/ReadmitIQ_deck.pptx
+++ b/docs/presentation/ReadmitIQ_deck.pptx
@@ -19,6 +19,10 @@
     <p:sldId id="267" r:id="rId19"/>
     <p:sldId id="268" r:id="rId20"/>
     <p:sldId id="269" r:id="rId21"/>
+    <p:sldId id="270" r:id="rId22"/>
+    <p:sldId id="271" r:id="rId23"/>
+    <p:sldId id="272" r:id="rId24"/>
+    <p:sldId id="273" r:id="rId25"/>
   </p:sldIdLst>
   <p:sldSz cx="12191695" cy="6858000" type="screen4x3"/>
   <p:notesSz cx="6858000" cy="9144000"/>
@@ -585,7 +589,7 @@
           <a:lstStyle/>
           <a:p>
             <a:r>
-              <a:t>Our web app has four clinical command views built in React, TypeScript, and Tailwind. In the live demo, we showcase the Cohort Triage dashboard with its interactive capacity slider and ROI calculator, followed by the Bedside Patient Assessment page featuring our calibrated risk dial, SHAP factor attributions, peer precedent table, and deterministic care-transition protocols.</a:t>
+              <a:t>For bedside decision support, ReadmitIQ provides a rigorous, telescoping waterfall in calibrated probability points. Unlike naive explanations that mislead clinicians, we strictly segregate unrecorded information from true clinical risk drivers, and provide contrastive tier gap analysis along with constrained, non-causal counterfactual care simulations.</a:t>
             </a:r>
           </a:p>
         </p:txBody>
@@ -655,7 +659,7 @@
           <a:lstStyle/>
           <a:p>
             <a:r>
-              <a:t>ReadmitIQ is not a notebook project; it is a containerized microservice. We benchmarked inference latency across 100 sequential requests, achieving a p95 latency of 386ms—well below our 500ms target. We built automated population drift telemetry tracking PSI across all 42 features, and our Lite serving mode operates within 195MB RAM, ensuring seamless deployment on 512MB free tiers.</a:t>
+              <a:t>To establish true scientific credibility, we tested our explanations against formal quality benchmarks. Our explanations are 3.16x more faithful than random baselines, highly stable under perturbation (0.992 Jaccard), and pass the Adebayo model-randomization sanity check with near-zero correlation (-0.0587). Multi-method consensus between TreeSHAP, split gain, and permutation importance confirms our rankings are robust.</a:t>
             </a:r>
           </a:p>
         </p:txBody>
@@ -725,7 +729,7 @@
           <a:lstStyle/>
           <a:p>
             <a:r>
-              <a:t>A mature engineering presentation acknowledges its boundaries. This dataset represents 1999–2008 care patterns and lacks modern GLP-1 drugs. Furthermore, our AUC of 0.659 reflects the reality that an EHR snapshot without continuous vitals or social determinants cannot predict human behavior with 90% accuracy. We frame ReadmitIQ responsibly: as an operational prioritization tool with a human clinician firmly in the loop.</a:t>
+              <a:t>Our clinical frontend is built with React, TypeScript, and Tailwind following a 'clinical editorial meets instrument panel' design. The Discharge Desk ranks patients strictly by raw model score to eliminate isotonic ties, while capacity controls instantly highlight the top N cases. The patient brief reveals calibrated risk, 20 similar historical precedents with Wilson intervals, and deterministic care actions.</a:t>
             </a:r>
           </a:p>
         </p:txBody>
@@ -795,7 +799,7 @@
           <a:lstStyle/>
           <a:p>
             <a:r>
-              <a:t>Our team split the project across seven specialized engineering roles: clinical framing, leakage isolation, ML modeling and calibration, structured RAG engineering, fairness and governance, full-stack UI, and production containerization. Each member took end-to-end ownership of their module while maintaining strict integration contracts.</a:t>
+              <a:t>ReadmitIQ includes live operational monitoring tracking score and feature drift in real time. We built a unique Time Machine control that advances simulated time, allowing judges to watch locked outcomes arrive and see empirical calibration and ROC-AUC update live before their eyes.</a:t>
             </a:r>
           </a:p>
         </p:txBody>
@@ -821,6 +825,286 @@
 </file>
 
 <file path=ppt/notesSlides/notesSlide14.xml><?xml version="1.0" encoding="utf-8"?>
+<p:notes xmlns:a="http://schemas.openxmlformats.org/drawingml/2006/main" xmlns:p="http://schemas.openxmlformats.org/presentationml/2006/main" xmlns:r="http://schemas.openxmlformats.org/officeDocument/2006/relationships">
+  <p:cSld>
+    <p:spTree>
+      <p:nvGrpSpPr>
+        <p:cNvPr id="1" name=""/>
+        <p:cNvGrpSpPr/>
+        <p:nvPr/>
+      </p:nvGrpSpPr>
+      <p:grpSpPr>
+        <a:xfrm>
+          <a:off x="0" y="0"/>
+          <a:ext cx="0" cy="0"/>
+          <a:chOff x="0" y="0"/>
+          <a:chExt cx="0" cy="0"/>
+        </a:xfrm>
+      </p:grpSpPr>
+      <p:sp>
+        <p:nvSpPr>
+          <p:cNvPr id="2" name="Slide Image Placeholder 1"/>
+          <p:cNvSpPr>
+            <a:spLocks noGrp="1"/>
+          </p:cNvSpPr>
+          <p:nvPr>
+            <p:ph type="sldImg" idx="2"/>
+          </p:nvPr>
+        </p:nvSpPr>
+        <p:spPr/>
+      </p:sp>
+      <p:sp>
+        <p:nvSpPr>
+          <p:cNvPr id="3" name="Notes Placeholder 2"/>
+          <p:cNvSpPr>
+            <a:spLocks noGrp="1"/>
+          </p:cNvSpPr>
+          <p:nvPr>
+            <p:ph type="body" idx="3" sz="quarter"/>
+          </p:nvPr>
+        </p:nvSpPr>
+        <p:spPr/>
+        <p:txBody>
+          <a:bodyPr/>
+          <a:lstStyle/>
+          <a:p>
+            <a:r>
+              <a:t>For hospital integration, we support three architectural patterns: real-time REST webhooks and CSV drops implemented today, alongside an HL7 FHIR adapter design. ReadmitIQ enforces a strict zero-PHI boundary by operating entirely on tokenized, de-identified feature vectors.</a:t>
+            </a:r>
+          </a:p>
+        </p:txBody>
+      </p:sp>
+      <p:sp>
+        <p:nvSpPr>
+          <p:cNvPr id="4" name="Slide Number Placeholder 3"/>
+          <p:cNvSpPr>
+            <a:spLocks noGrp="1"/>
+          </p:cNvSpPr>
+          <p:nvPr>
+            <p:ph type="sldNum" idx="5" sz="quarter"/>
+          </p:nvPr>
+        </p:nvSpPr>
+        <p:spPr/>
+      </p:sp>
+    </p:spTree>
+  </p:cSld>
+  <p:clrMapOvr>
+    <a:masterClrMapping/>
+  </p:clrMapOvr>
+</p:notes>
+</file>
+
+<file path=ppt/notesSlides/notesSlide15.xml><?xml version="1.0" encoding="utf-8"?>
+<p:notes xmlns:a="http://schemas.openxmlformats.org/drawingml/2006/main" xmlns:p="http://schemas.openxmlformats.org/presentationml/2006/main" xmlns:r="http://schemas.openxmlformats.org/officeDocument/2006/relationships">
+  <p:cSld>
+    <p:spTree>
+      <p:nvGrpSpPr>
+        <p:cNvPr id="1" name=""/>
+        <p:cNvGrpSpPr/>
+        <p:nvPr/>
+      </p:nvGrpSpPr>
+      <p:grpSpPr>
+        <a:xfrm>
+          <a:off x="0" y="0"/>
+          <a:ext cx="0" cy="0"/>
+          <a:chOff x="0" y="0"/>
+          <a:chExt cx="0" cy="0"/>
+        </a:xfrm>
+      </p:grpSpPr>
+      <p:sp>
+        <p:nvSpPr>
+          <p:cNvPr id="2" name="Slide Image Placeholder 1"/>
+          <p:cNvSpPr>
+            <a:spLocks noGrp="1"/>
+          </p:cNvSpPr>
+          <p:nvPr>
+            <p:ph type="sldImg" idx="2"/>
+          </p:nvPr>
+        </p:nvSpPr>
+        <p:spPr/>
+      </p:sp>
+      <p:sp>
+        <p:nvSpPr>
+          <p:cNvPr id="3" name="Notes Placeholder 2"/>
+          <p:cNvSpPr>
+            <a:spLocks noGrp="1"/>
+          </p:cNvSpPr>
+          <p:nvPr>
+            <p:ph type="body" idx="3" sz="quarter"/>
+          </p:nvPr>
+        </p:nvSpPr>
+        <p:spPr/>
+        <p:txBody>
+          <a:bodyPr/>
+          <a:lstStyle/>
+          <a:p>
+            <a:r>
+              <a:t>ReadmitIQ is not a notebook project; it is a containerized microservice. We benchmarked inference latency across 100 sequential requests, achieving a p95 latency of 386ms—well below our 500ms target. We built automated population drift telemetry tracking PSI across all 42 features, and our Lite serving mode operates within 195MB RAM, ensuring seamless deployment on 512MB free tiers.</a:t>
+            </a:r>
+          </a:p>
+        </p:txBody>
+      </p:sp>
+      <p:sp>
+        <p:nvSpPr>
+          <p:cNvPr id="4" name="Slide Number Placeholder 3"/>
+          <p:cNvSpPr>
+            <a:spLocks noGrp="1"/>
+          </p:cNvSpPr>
+          <p:nvPr>
+            <p:ph type="sldNum" idx="5" sz="quarter"/>
+          </p:nvPr>
+        </p:nvSpPr>
+        <p:spPr/>
+      </p:sp>
+    </p:spTree>
+  </p:cSld>
+  <p:clrMapOvr>
+    <a:masterClrMapping/>
+  </p:clrMapOvr>
+</p:notes>
+</file>
+
+<file path=ppt/notesSlides/notesSlide16.xml><?xml version="1.0" encoding="utf-8"?>
+<p:notes xmlns:a="http://schemas.openxmlformats.org/drawingml/2006/main" xmlns:p="http://schemas.openxmlformats.org/presentationml/2006/main" xmlns:r="http://schemas.openxmlformats.org/officeDocument/2006/relationships">
+  <p:cSld>
+    <p:spTree>
+      <p:nvGrpSpPr>
+        <p:cNvPr id="1" name=""/>
+        <p:cNvGrpSpPr/>
+        <p:nvPr/>
+      </p:nvGrpSpPr>
+      <p:grpSpPr>
+        <a:xfrm>
+          <a:off x="0" y="0"/>
+          <a:ext cx="0" cy="0"/>
+          <a:chOff x="0" y="0"/>
+          <a:chExt cx="0" cy="0"/>
+        </a:xfrm>
+      </p:grpSpPr>
+      <p:sp>
+        <p:nvSpPr>
+          <p:cNvPr id="2" name="Slide Image Placeholder 1"/>
+          <p:cNvSpPr>
+            <a:spLocks noGrp="1"/>
+          </p:cNvSpPr>
+          <p:nvPr>
+            <p:ph type="sldImg" idx="2"/>
+          </p:nvPr>
+        </p:nvSpPr>
+        <p:spPr/>
+      </p:sp>
+      <p:sp>
+        <p:nvSpPr>
+          <p:cNvPr id="3" name="Notes Placeholder 2"/>
+          <p:cNvSpPr>
+            <a:spLocks noGrp="1"/>
+          </p:cNvSpPr>
+          <p:nvPr>
+            <p:ph type="body" idx="3" sz="quarter"/>
+          </p:nvPr>
+        </p:nvSpPr>
+        <p:spPr/>
+        <p:txBody>
+          <a:bodyPr/>
+          <a:lstStyle/>
+          <a:p>
+            <a:r>
+              <a:t>A mature engineering presentation acknowledges its boundaries. This dataset represents 1999–2008 care patterns and lacks modern GLP-1 drugs. Furthermore, our AUC of 0.659 reflects the reality that an EHR snapshot without continuous vitals or social determinants cannot predict human behavior with 90% accuracy. We frame ReadmitIQ responsibly: as an operational prioritization tool with a human clinician firmly in the loop.</a:t>
+            </a:r>
+          </a:p>
+        </p:txBody>
+      </p:sp>
+      <p:sp>
+        <p:nvSpPr>
+          <p:cNvPr id="4" name="Slide Number Placeholder 3"/>
+          <p:cNvSpPr>
+            <a:spLocks noGrp="1"/>
+          </p:cNvSpPr>
+          <p:nvPr>
+            <p:ph type="sldNum" idx="5" sz="quarter"/>
+          </p:nvPr>
+        </p:nvSpPr>
+        <p:spPr/>
+      </p:sp>
+    </p:spTree>
+  </p:cSld>
+  <p:clrMapOvr>
+    <a:masterClrMapping/>
+  </p:clrMapOvr>
+</p:notes>
+</file>
+
+<file path=ppt/notesSlides/notesSlide17.xml><?xml version="1.0" encoding="utf-8"?>
+<p:notes xmlns:a="http://schemas.openxmlformats.org/drawingml/2006/main" xmlns:p="http://schemas.openxmlformats.org/presentationml/2006/main" xmlns:r="http://schemas.openxmlformats.org/officeDocument/2006/relationships">
+  <p:cSld>
+    <p:spTree>
+      <p:nvGrpSpPr>
+        <p:cNvPr id="1" name=""/>
+        <p:cNvGrpSpPr/>
+        <p:nvPr/>
+      </p:nvGrpSpPr>
+      <p:grpSpPr>
+        <a:xfrm>
+          <a:off x="0" y="0"/>
+          <a:ext cx="0" cy="0"/>
+          <a:chOff x="0" y="0"/>
+          <a:chExt cx="0" cy="0"/>
+        </a:xfrm>
+      </p:grpSpPr>
+      <p:sp>
+        <p:nvSpPr>
+          <p:cNvPr id="2" name="Slide Image Placeholder 1"/>
+          <p:cNvSpPr>
+            <a:spLocks noGrp="1"/>
+          </p:cNvSpPr>
+          <p:nvPr>
+            <p:ph type="sldImg" idx="2"/>
+          </p:nvPr>
+        </p:nvSpPr>
+        <p:spPr/>
+      </p:sp>
+      <p:sp>
+        <p:nvSpPr>
+          <p:cNvPr id="3" name="Notes Placeholder 2"/>
+          <p:cNvSpPr>
+            <a:spLocks noGrp="1"/>
+          </p:cNvSpPr>
+          <p:nvPr>
+            <p:ph type="body" idx="3" sz="quarter"/>
+          </p:nvPr>
+        </p:nvSpPr>
+        <p:spPr/>
+        <p:txBody>
+          <a:bodyPr/>
+          <a:lstStyle/>
+          <a:p>
+            <a:r>
+              <a:t>Our team split the project across seven specialized engineering roles: clinical framing, leakage isolation, ML modeling and calibration, structured RAG engineering, fairness and governance, full-stack UI, and production containerization. Each member took end-to-end ownership of their module while maintaining strict integration contracts.</a:t>
+            </a:r>
+          </a:p>
+        </p:txBody>
+      </p:sp>
+      <p:sp>
+        <p:nvSpPr>
+          <p:cNvPr id="4" name="Slide Number Placeholder 3"/>
+          <p:cNvSpPr>
+            <a:spLocks noGrp="1"/>
+          </p:cNvSpPr>
+          <p:nvPr>
+            <p:ph type="sldNum" idx="5" sz="quarter"/>
+          </p:nvPr>
+        </p:nvSpPr>
+        <p:spPr/>
+      </p:sp>
+    </p:spTree>
+  </p:cSld>
+  <p:clrMapOvr>
+    <a:masterClrMapping/>
+  </p:clrMapOvr>
+</p:notes>
+</file>
+
+<file path=ppt/notesSlides/notesSlide18.xml><?xml version="1.0" encoding="utf-8"?>
 <p:notes xmlns:a="http://schemas.openxmlformats.org/drawingml/2006/main" xmlns:p="http://schemas.openxmlformats.org/presentationml/2006/main" xmlns:r="http://schemas.openxmlformats.org/officeDocument/2006/relationships">
   <p:cSld>
     <p:spTree>
@@ -4717,7 +5001,7 @@
               </a:defRPr>
             </a:pPr>
             <a:r>
-              <a:t>09. PRODUCT DEMO &amp; CLINICAL WORKFLOW</a:t>
+              <a:t>08A. CLINICAL DECISION SUPPORT &amp; LOCAL EXPLANATION</a:t>
             </a:r>
           </a:p>
         </p:txBody>
@@ -4752,7 +5036,7 @@
               </a:defRPr>
             </a:pPr>
             <a:r>
-              <a:t>ReadmitIQ Command Center: User Experience &amp; Demo Flow</a:t>
+              <a:t>Explaining a Prediction: Calibrated Waterfall &amp; Driver Attribution</a:t>
             </a:r>
           </a:p>
         </p:txBody>
@@ -4766,7 +5050,7 @@
         <p:spPr>
           <a:xfrm>
             <a:off x="731520" y="1463040"/>
-            <a:ext cx="5120640" cy="4754880"/>
+            <a:ext cx="5303520" cy="4754880"/>
           </a:xfrm>
           <a:prstGeom prst="roundRect">
             <a:avLst/>
@@ -4811,7 +5095,7 @@
         <p:spPr>
           <a:xfrm>
             <a:off x="914400" y="1600200"/>
-            <a:ext cx="4754879" cy="365760"/>
+            <a:ext cx="4937759" cy="365760"/>
           </a:xfrm>
           <a:prstGeom prst="rect">
             <a:avLst/>
@@ -4832,14 +5116,130 @@
               </a:defRPr>
             </a:pPr>
             <a:r>
-              <a:t>1. Cohort Triage &amp; ROI What-If Simulator</a:t>
+              <a:t>1. Telescoping Calibrated Waterfall &amp; Unrecorded Data</a:t>
+            </a:r>
+          </a:p>
+        </p:txBody>
+      </p:sp>
+      <p:sp>
+        <p:nvSpPr>
+          <p:cNvPr id="7" name="TextBox 6"/>
+          <p:cNvSpPr txBox="1"/>
+          <p:nvPr/>
+        </p:nvSpPr>
+        <p:spPr>
+          <a:xfrm>
+            <a:off x="914400" y="2011680"/>
+            <a:ext cx="4937760" cy="2011680"/>
+          </a:xfrm>
+          <a:prstGeom prst="rect">
+            <a:avLst/>
+          </a:prstGeom>
+          <a:noFill/>
+        </p:spPr>
+        <p:txBody>
+          <a:bodyPr wrap="square">
+            <a:spAutoFit/>
+          </a:bodyPr>
+          <a:lstStyle/>
+          <a:p>
+            <a:pPr>
+              <a:defRPr sz="1100">
+                <a:solidFill>
+                  <a:srgbClr val="F8FAFC"/>
+                </a:solidFill>
+              </a:defRPr>
+            </a:pPr>
+            <a:r>
+              <a:t>Order-Dependent Calibrated Probability Decomposition:</a:t>
+            </a:r>
+          </a:p>
+          <a:p>
+            <a:pPr>
+              <a:defRPr sz="1100">
+                <a:solidFill>
+                  <a:srgbClr val="F8FAFC"/>
+                </a:solidFill>
+              </a:defRPr>
+            </a:pPr>
+            <a:r>
+              <a:t>• Base Reference Risk: 10.75% (margin -0.1960). Mean validation risk: 11.50%.</a:t>
+            </a:r>
+          </a:p>
+          <a:p>
+            <a:pPr>
+              <a:defRPr sz="1100">
+                <a:solidFill>
+                  <a:srgbClr val="F8FAFC"/>
+                </a:solidFill>
+              </a:defRPr>
+            </a:pPr>
+            <a:r>
+              <a:t>• Intermediate cumulative margins pass through sigmoid and isotonic calibrator.</a:t>
+            </a:r>
+          </a:p>
+          <a:p>
+            <a:pPr>
+              <a:defRPr sz="1100">
+                <a:solidFill>
+                  <a:srgbClr val="F8FAFC"/>
+                </a:solidFill>
+              </a:defRPr>
+            </a:pPr>
+            <a:r>
+              <a:t>• Telescopes identically to final calibrated risk points: P_k = g(sigma(m_k)).</a:t>
+            </a:r>
+          </a:p>
+          <a:p>
+            <a:pPr>
+              <a:defRPr sz="1100">
+                <a:solidFill>
+                  <a:srgbClr val="F8FAFC"/>
+                </a:solidFill>
+              </a:defRPr>
+            </a:pPr>
+          </a:p>
+          <a:p>
+            <a:pPr>
+              <a:defRPr sz="1100">
+                <a:solidFill>
+                  <a:srgbClr val="F8FAFC"/>
+                </a:solidFill>
+              </a:defRPr>
+            </a:pPr>
+            <a:r>
+              <a:t>Data-Completeness Segregation:</a:t>
+            </a:r>
+          </a:p>
+          <a:p>
+            <a:pPr>
+              <a:defRPr sz="1100">
+                <a:solidFill>
+                  <a:srgbClr val="F8FAFC"/>
+                </a:solidFill>
+              </a:defRPr>
+            </a:pPr>
+            <a:r>
+              <a:t>• 'Missing'/'None' fields (e.g. payer_code, unmeasured A1C) are strictly segregated.</a:t>
+            </a:r>
+          </a:p>
+          <a:p>
+            <a:pPr>
+              <a:defRPr sz="1100">
+                <a:solidFill>
+                  <a:srgbClr val="F8FAFC"/>
+                </a:solidFill>
+              </a:defRPr>
+            </a:pPr>
+            <a:r>
+              <a:t>• Described with neutral phrasing; excluded from clinical risk drivers.</a:t>
             </a:r>
           </a:p>
         </p:txBody>
       </p:sp>
       <p:pic>
         <p:nvPicPr>
-          <p:cNvPr id="7" name="Picture 6" descr="cohort_triage_desktop.png"/>
+          <p:cNvPr id="8" name="Picture 7" descr="example_patient_waterfall.png"/>
           <p:cNvPicPr>
             <a:picLocks noChangeAspect="1"/>
           </p:cNvPicPr>
@@ -4853,49 +5253,14 @@
         </p:blipFill>
         <p:spPr>
           <a:xfrm>
-            <a:off x="914400" y="2011680"/>
-            <a:ext cx="4754880" cy="14283214"/>
+            <a:off x="914400" y="4114800"/>
+            <a:ext cx="4937760" cy="2468880"/>
           </a:xfrm>
           <a:prstGeom prst="rect">
             <a:avLst/>
           </a:prstGeom>
         </p:spPr>
       </p:pic>
-      <p:sp>
-        <p:nvSpPr>
-          <p:cNvPr id="8" name="TextBox 7"/>
-          <p:cNvSpPr txBox="1"/>
-          <p:nvPr/>
-        </p:nvSpPr>
-        <p:spPr>
-          <a:xfrm>
-            <a:off x="914400" y="4754880"/>
-            <a:ext cx="4754880" cy="1280160"/>
-          </a:xfrm>
-          <a:prstGeom prst="rect">
-            <a:avLst/>
-          </a:prstGeom>
-          <a:noFill/>
-        </p:spPr>
-        <p:txBody>
-          <a:bodyPr wrap="square">
-            <a:spAutoFit/>
-          </a:bodyPr>
-          <a:lstStyle/>
-          <a:p>
-            <a:pPr>
-              <a:defRPr sz="1100">
-                <a:solidFill>
-                  <a:srgbClr val="F8FAFC"/>
-                </a:solidFill>
-              </a:defRPr>
-            </a:pPr>
-            <a:r>
-              <a:t>Care coordinators slide outreach capacity (1%-30%). At 10%, catches 354 true readmissions; What-If ROI simulator models $342k net savings.</a:t>
-            </a:r>
-          </a:p>
-        </p:txBody>
-      </p:sp>
       <p:sp>
         <p:nvSpPr>
           <p:cNvPr id="9" name="Rounded Rectangle 8"/>
@@ -4904,8 +5269,8 @@
         </p:nvSpPr>
         <p:spPr>
           <a:xfrm>
-            <a:off x="6126480" y="1463040"/>
-            <a:ext cx="5303520" cy="4754880"/>
+            <a:off x="6217920" y="1463040"/>
+            <a:ext cx="5212080" cy="4754880"/>
           </a:xfrm>
           <a:prstGeom prst="roundRect">
             <a:avLst/>
@@ -4949,8 +5314,8 @@
         </p:nvSpPr>
         <p:spPr>
           <a:xfrm>
-            <a:off x="6309360" y="1600200"/>
-            <a:ext cx="4937759" cy="365760"/>
+            <a:off x="6400800" y="1600200"/>
+            <a:ext cx="4846320" cy="365760"/>
           </a:xfrm>
           <a:prstGeom prst="rect">
             <a:avLst/>
@@ -4971,45 +5336,21 @@
               </a:defRPr>
             </a:pPr>
             <a:r>
-              <a:t>2. Patient Bedside Profile &amp; Precedent Inspection</a:t>
-            </a:r>
-          </a:p>
-        </p:txBody>
-      </p:sp>
-      <p:pic>
-        <p:nvPicPr>
-          <p:cNvPr id="11" name="Picture 10" descr="patient_risk_desktop.png"/>
-          <p:cNvPicPr>
-            <a:picLocks noChangeAspect="1"/>
-          </p:cNvPicPr>
-          <p:nvPr/>
-        </p:nvPicPr>
-        <p:blipFill>
-          <a:blip r:embed="rId3"/>
-          <a:stretch>
-            <a:fillRect/>
-          </a:stretch>
-        </p:blipFill>
-        <p:spPr>
-          <a:xfrm>
-            <a:off x="6309360" y="2011680"/>
-            <a:ext cx="4937760" cy="11449431"/>
-          </a:xfrm>
-          <a:prstGeom prst="rect">
-            <a:avLst/>
-          </a:prstGeom>
-        </p:spPr>
-      </p:pic>
-      <p:sp>
-        <p:nvSpPr>
-          <p:cNvPr id="12" name="TextBox 11"/>
+              <a:t>2. Clinical Groups &amp; Constrained Counterfactuals</a:t>
+            </a:r>
+          </a:p>
+        </p:txBody>
+      </p:sp>
+      <p:sp>
+        <p:nvSpPr>
+          <p:cNvPr id="11" name="TextBox 10"/>
           <p:cNvSpPr txBox="1"/>
           <p:nvPr/>
         </p:nvSpPr>
         <p:spPr>
           <a:xfrm>
-            <a:off x="6309360" y="4754880"/>
-            <a:ext cx="4937760" cy="1280160"/>
+            <a:off x="6400800" y="2011680"/>
+            <a:ext cx="4846320" cy="4023360"/>
           </a:xfrm>
           <a:prstGeom prst="rect">
             <a:avLst/>
@@ -5023,14 +5364,173 @@
           <a:lstStyle/>
           <a:p>
             <a:pPr>
-              <a:defRPr sz="1100">
-                <a:solidFill>
-                  <a:srgbClr val="F8FAFC"/>
-                </a:solidFill>
-              </a:defRPr>
-            </a:pPr>
-            <a:r>
-              <a:t>Calibrated risk dial (Critical, High, Medium, Low), plain-text SHAP drivers, peer precedent table, and deterministic care transition actions.</a:t>
+              <a:defRPr sz="1050">
+                <a:solidFill>
+                  <a:srgbClr val="F8FAFC"/>
+                </a:solidFill>
+              </a:defRPr>
+            </a:pPr>
+            <a:r>
+              <a:t>9 Clinical Feature Taxonomies:</a:t>
+            </a:r>
+          </a:p>
+          <a:p>
+            <a:pPr>
+              <a:defRPr sz="1050">
+                <a:solidFill>
+                  <a:srgbClr val="F8FAFC"/>
+                </a:solidFill>
+              </a:defRPr>
+            </a:pPr>
+            <a:r>
+              <a:t>• Prior utilization (26.5% share), discharge context (16.7%), diagnoses (11.8%), medications (10.9%), stay intensity, glycemic labs, demographics, admin, structured RAG.</a:t>
+            </a:r>
+          </a:p>
+          <a:p>
+            <a:pPr>
+              <a:defRPr sz="1050">
+                <a:solidFill>
+                  <a:srgbClr val="F8FAFC"/>
+                </a:solidFill>
+              </a:defRPr>
+            </a:pPr>
+            <a:r>
+              <a:t>• Driver Strengths: Empirically computed tertiles (small &lt;=0.0032, moderate &lt;=0.0197, large &gt;0.0197).</a:t>
+            </a:r>
+          </a:p>
+          <a:p>
+            <a:pPr>
+              <a:defRPr sz="1050">
+                <a:solidFill>
+                  <a:srgbClr val="F8FAFC"/>
+                </a:solidFill>
+              </a:defRPr>
+            </a:pPr>
+          </a:p>
+          <a:p>
+            <a:pPr>
+              <a:defRPr sz="1050">
+                <a:solidFill>
+                  <a:srgbClr val="F8FAFC"/>
+                </a:solidFill>
+              </a:defRPr>
+            </a:pPr>
+            <a:r>
+              <a:t>Contrastive Tier Gap Analysis:</a:t>
+            </a:r>
+          </a:p>
+          <a:p>
+            <a:pPr>
+              <a:defRPr sz="1050">
+                <a:solidFill>
+                  <a:srgbClr val="F8FAFC"/>
+                </a:solidFill>
+              </a:defRPr>
+            </a:pPr>
+            <a:r>
+              <a:t>• Computes exact SHAP delta between patient and median patient of next lower tier.</a:t>
+            </a:r>
+          </a:p>
+          <a:p>
+            <a:pPr>
+              <a:defRPr sz="1050">
+                <a:solidFill>
+                  <a:srgbClr val="F8FAFC"/>
+                </a:solidFill>
+              </a:defRPr>
+            </a:pPr>
+          </a:p>
+          <a:p>
+            <a:pPr>
+              <a:defRPr sz="1050">
+                <a:solidFill>
+                  <a:srgbClr val="F8FAFC"/>
+                </a:solidFill>
+              </a:defRPr>
+            </a:pPr>
+            <a:r>
+              <a:t>Constrained Counterfactual Care Plans:</a:t>
+            </a:r>
+          </a:p>
+          <a:p>
+            <a:pPr>
+              <a:defRPr sz="1050">
+                <a:solidFill>
+                  <a:srgbClr val="F8FAFC"/>
+                </a:solidFill>
+              </a:defRPr>
+            </a:pPr>
+            <a:r>
+              <a:t>• Only modifiable factors (discharge disposition, med regimen stabilization).</a:t>
+            </a:r>
+          </a:p>
+          <a:p>
+            <a:pPr>
+              <a:defRPr sz="1050">
+                <a:solidFill>
+                  <a:srgbClr val="F8FAFC"/>
+                </a:solidFill>
+              </a:defRPr>
+            </a:pPr>
+            <a:r>
+              <a:t>• Restricted strictly to training boundaries; greedy search for minimal tier shift.</a:t>
+            </a:r>
+          </a:p>
+          <a:p>
+            <a:pPr>
+              <a:defRPr sz="1050">
+                <a:solidFill>
+                  <a:srgbClr val="F8FAFC"/>
+                </a:solidFill>
+              </a:defRPr>
+            </a:pPr>
+            <a:r>
+              <a:t>• Labeled: associative model sensitivity, not causal effect.</a:t>
+            </a:r>
+          </a:p>
+          <a:p>
+            <a:pPr>
+              <a:defRPr sz="1050">
+                <a:solidFill>
+                  <a:srgbClr val="F8FAFC"/>
+                </a:solidFill>
+              </a:defRPr>
+            </a:pPr>
+          </a:p>
+          <a:p>
+            <a:pPr>
+              <a:defRPr sz="1050">
+                <a:solidFill>
+                  <a:srgbClr val="F8FAFC"/>
+                </a:solidFill>
+              </a:defRPr>
+            </a:pPr>
+            <a:r>
+              <a:t>Precedent Agreement &amp; Local Reliability:</a:t>
+            </a:r>
+          </a:p>
+          <a:p>
+            <a:pPr>
+              <a:defRPr sz="1050">
+                <a:solidFill>
+                  <a:srgbClr val="F8FAFC"/>
+                </a:solidFill>
+              </a:defRPr>
+            </a:pPr>
+            <a:r>
+              <a:t>• Validates prediction consistency against k=20 peer readmission rate Wilson 95% CI.</a:t>
+            </a:r>
+          </a:p>
+          <a:p>
+            <a:pPr>
+              <a:defRPr sz="1050">
+                <a:solidFill>
+                  <a:srgbClr val="F8FAFC"/>
+                </a:solidFill>
+              </a:defRPr>
+            </a:pPr>
+            <a:r>
+              <a:t>• Grounded in 10 validation risk calibration bins.</a:t>
             </a:r>
           </a:p>
         </p:txBody>
@@ -5126,7 +5626,7 @@
               </a:defRPr>
             </a:pPr>
             <a:r>
-              <a:t>10. PRODUCTION DEPLOYMENT &amp; INTEGRATION</a:t>
+              <a:t>08B. EXPLANATION FAITHFULNESS, STABILITY &amp; SANITY AUDIT</a:t>
             </a:r>
           </a:p>
         </p:txBody>
@@ -5161,7 +5661,7 @@
               </a:defRPr>
             </a:pPr>
             <a:r>
-              <a:t>Enterprise Production Readiness, Latency &amp; Drift Telemetry</a:t>
+              <a:t>Can We Trust the Explanations? Quality &amp; Sanity Benchmarks</a:t>
             </a:r>
           </a:p>
         </p:txBody>
@@ -5175,7 +5675,7 @@
         <p:spPr>
           <a:xfrm>
             <a:off x="731520" y="1463040"/>
-            <a:ext cx="5120640" cy="4754880"/>
+            <a:ext cx="5303520" cy="4754880"/>
           </a:xfrm>
           <a:prstGeom prst="roundRect">
             <a:avLst/>
@@ -5220,7 +5720,7 @@
         <p:spPr>
           <a:xfrm>
             <a:off x="914400" y="1600200"/>
-            <a:ext cx="4754879" cy="365760"/>
+            <a:ext cx="4937759" cy="365760"/>
           </a:xfrm>
           <a:prstGeom prst="rect">
             <a:avLst/>
@@ -5241,7 +5741,7 @@
               </a:defRPr>
             </a:pPr>
             <a:r>
-              <a:t>Production Engineering Specs</a:t>
+              <a:t>1. Explanation Faithfulness &amp; Robustness</a:t>
             </a:r>
           </a:p>
         </p:txBody>
@@ -5255,7 +5755,7 @@
         <p:spPr>
           <a:xfrm>
             <a:off x="914400" y="2011680"/>
-            <a:ext cx="4754880" cy="4023360"/>
+            <a:ext cx="4937760" cy="2103120"/>
           </a:xfrm>
           <a:prstGeom prst="rect">
             <a:avLst/>
@@ -5269,163 +5769,175 @@
           <a:lstStyle/>
           <a:p>
             <a:pPr>
-              <a:defRPr sz="1150">
-                <a:solidFill>
-                  <a:srgbClr val="F8FAFC"/>
-                </a:solidFill>
-              </a:defRPr>
-            </a:pPr>
-            <a:r>
-              <a:t>• FastAPI Backend with 7 Verified Endpoints:</a:t>
-            </a:r>
-          </a:p>
-          <a:p>
-            <a:pPr>
-              <a:defRPr sz="1150">
-                <a:solidFill>
-                  <a:srgbClr val="F8FAFC"/>
-                </a:solidFill>
-              </a:defRPr>
-            </a:pPr>
-            <a:r>
-              <a:t>  /health, /predict, /similar, /explain, /cohort, /metrics, /interventions.</a:t>
-            </a:r>
-          </a:p>
-          <a:p>
-            <a:pPr>
-              <a:defRPr sz="1150">
-                <a:solidFill>
-                  <a:srgbClr val="F8FAFC"/>
-                </a:solidFill>
-              </a:defRPr>
-            </a:pPr>
-          </a:p>
-          <a:p>
-            <a:pPr>
-              <a:defRPr sz="1150">
-                <a:solidFill>
-                  <a:srgbClr val="F8FAFC"/>
-                </a:solidFill>
-              </a:defRPr>
-            </a:pPr>
-            <a:r>
-              <a:t>• Measured Latency Profile (100 Requests):</a:t>
-            </a:r>
-          </a:p>
-          <a:p>
-            <a:pPr>
-              <a:defRPr sz="1150">
-                <a:solidFill>
-                  <a:srgbClr val="F8FAFC"/>
-                </a:solidFill>
-              </a:defRPr>
-            </a:pPr>
-            <a:r>
-              <a:t>  Mean: 257.9ms | Median: 243.6ms | p95: 386.0ms (&lt;500ms gate: PASS).</a:t>
-            </a:r>
-          </a:p>
-          <a:p>
-            <a:pPr>
-              <a:defRPr sz="1150">
-                <a:solidFill>
-                  <a:srgbClr val="F8FAFC"/>
-                </a:solidFill>
-              </a:defRPr>
-            </a:pPr>
-          </a:p>
-          <a:p>
-            <a:pPr>
-              <a:defRPr sz="1150">
-                <a:solidFill>
-                  <a:srgbClr val="F8FAFC"/>
-                </a:solidFill>
-              </a:defRPr>
-            </a:pPr>
-            <a:r>
-              <a:t>• Dual Serving Footprints:</a:t>
-            </a:r>
-          </a:p>
-          <a:p>
-            <a:pPr>
-              <a:defRPr sz="1150">
-                <a:solidFill>
-                  <a:srgbClr val="F8FAFC"/>
-                </a:solidFill>
-              </a:defRPr>
-            </a:pPr>
-            <a:r>
-              <a:t>  - Full Mode: 18.5MB disk, 466.3MB RAM.</a:t>
-            </a:r>
-          </a:p>
-          <a:p>
-            <a:pPr>
-              <a:defRPr sz="1150">
-                <a:solidFill>
-                  <a:srgbClr val="F8FAFC"/>
-                </a:solidFill>
-              </a:defRPr>
-            </a:pPr>
-            <a:r>
-              <a:t>  - Lite Mode: 1.69MB disk (90.9% reduction), 435.2MB RAM.</a:t>
-            </a:r>
-          </a:p>
-          <a:p>
-            <a:pPr>
-              <a:defRPr sz="1150">
-                <a:solidFill>
-                  <a:srgbClr val="F8FAFC"/>
-                </a:solidFill>
-              </a:defRPr>
-            </a:pPr>
-            <a:r>
-              <a:t>  - Fits comfortably within 512MB free tier containers.</a:t>
-            </a:r>
-          </a:p>
-          <a:p>
-            <a:pPr>
-              <a:defRPr sz="1150">
-                <a:solidFill>
-                  <a:srgbClr val="F8FAFC"/>
-                </a:solidFill>
-              </a:defRPr>
-            </a:pPr>
-          </a:p>
-          <a:p>
-            <a:pPr>
-              <a:defRPr sz="1150">
-                <a:solidFill>
-                  <a:srgbClr val="F8FAFC"/>
-                </a:solidFill>
-              </a:defRPr>
-            </a:pPr>
-            <a:r>
-              <a:t>• 100% CI Quality Gates:</a:t>
-            </a:r>
-          </a:p>
-          <a:p>
-            <a:pPr>
-              <a:defRPr sz="1150">
-                <a:solidFill>
-                  <a:srgbClr val="F8FAFC"/>
-                </a:solidFill>
-              </a:defRPr>
-            </a:pPr>
-            <a:r>
-              <a:t>  34/34 Pytest unit tests passing; 11/11 Playwright E2E smoke tests passing; ESLint &amp; Black clean.</a:t>
-            </a:r>
-          </a:p>
-        </p:txBody>
-      </p:sp>
-      <p:sp>
-        <p:nvSpPr>
-          <p:cNvPr id="8" name="Rounded Rectangle 7"/>
+              <a:defRPr sz="1050">
+                <a:solidFill>
+                  <a:srgbClr val="F8FAFC"/>
+                </a:solidFill>
+              </a:defRPr>
+            </a:pPr>
+            <a:r>
+              <a:t>Rigorous Quantitative Quality Benchmarks:</a:t>
+            </a:r>
+          </a:p>
+          <a:p>
+            <a:pPr>
+              <a:defRPr sz="1050">
+                <a:solidFill>
+                  <a:srgbClr val="F8FAFC"/>
+                </a:solidFill>
+              </a:defRPr>
+            </a:pPr>
+            <a:r>
+              <a:t>• Faithfulness Deletion Ratio: 3.16x</a:t>
+            </a:r>
+          </a:p>
+          <a:p>
+            <a:pPr>
+              <a:defRPr sz="1050">
+                <a:solidFill>
+                  <a:srgbClr val="F8FAFC"/>
+                </a:solidFill>
+              </a:defRPr>
+            </a:pPr>
+            <a:r>
+              <a:t>  Top-5 SHAP feature deletion degrades prediction accuracy 3.16x faster than random ablation.</a:t>
+            </a:r>
+          </a:p>
+          <a:p>
+            <a:pPr>
+              <a:defRPr sz="1050">
+                <a:solidFill>
+                  <a:srgbClr val="F8FAFC"/>
+                </a:solidFill>
+              </a:defRPr>
+            </a:pPr>
+          </a:p>
+          <a:p>
+            <a:pPr>
+              <a:defRPr sz="1050">
+                <a:solidFill>
+                  <a:srgbClr val="F8FAFC"/>
+                </a:solidFill>
+              </a:defRPr>
+            </a:pPr>
+            <a:r>
+              <a:t>• Input Perturbation Stability: Jaccard 0.992 | Median Rank rho = 1.000</a:t>
+            </a:r>
+          </a:p>
+          <a:p>
+            <a:pPr>
+              <a:defRPr sz="1050">
+                <a:solidFill>
+                  <a:srgbClr val="F8FAFC"/>
+                </a:solidFill>
+              </a:defRPr>
+            </a:pPr>
+            <a:r>
+              <a:t>  Top-5 explanations are virtually invariant under valid 5% continuous input noise.</a:t>
+            </a:r>
+          </a:p>
+          <a:p>
+            <a:pPr>
+              <a:defRPr sz="1050">
+                <a:solidFill>
+                  <a:srgbClr val="F8FAFC"/>
+                </a:solidFill>
+              </a:defRPr>
+            </a:pPr>
+          </a:p>
+          <a:p>
+            <a:pPr>
+              <a:defRPr sz="1050">
+                <a:solidFill>
+                  <a:srgbClr val="F8FAFC"/>
+                </a:solidFill>
+              </a:defRPr>
+            </a:pPr>
+            <a:r>
+              <a:t>• Adebayo Sanity Check: Passed (rho = -0.0587)</a:t>
+            </a:r>
+          </a:p>
+          <a:p>
+            <a:pPr>
+              <a:defRPr sz="1050">
+                <a:solidFill>
+                  <a:srgbClr val="F8FAFC"/>
+                </a:solidFill>
+              </a:defRPr>
+            </a:pPr>
+            <a:r>
+              <a:t>  Explanations on a model trained with permuted labels collapse to near-zero rank correlation.</a:t>
+            </a:r>
+          </a:p>
+          <a:p>
+            <a:pPr>
+              <a:defRPr sz="1050">
+                <a:solidFill>
+                  <a:srgbClr val="F8FAFC"/>
+                </a:solidFill>
+              </a:defRPr>
+            </a:pPr>
+          </a:p>
+          <a:p>
+            <a:pPr>
+              <a:defRPr sz="1050">
+                <a:solidFill>
+                  <a:srgbClr val="F8FAFC"/>
+                </a:solidFill>
+              </a:defRPr>
+            </a:pPr>
+            <a:r>
+              <a:t>• TreeSHAP Additivity: Max error 3.60e-07 (tolerance &lt; 1.0e-06).</a:t>
+            </a:r>
+          </a:p>
+          <a:p>
+            <a:pPr>
+              <a:defRPr sz="1050">
+                <a:solidFill>
+                  <a:srgbClr val="F8FAFC"/>
+                </a:solidFill>
+              </a:defRPr>
+            </a:pPr>
+            <a:r>
+              <a:t>• Real-Time CPU Latency: 10.85 ms (well below 300 ms SLA budget).</a:t>
+            </a:r>
+          </a:p>
+        </p:txBody>
+      </p:sp>
+      <p:pic>
+        <p:nvPicPr>
+          <p:cNvPr id="8" name="Picture 7" descr="faithfulness_curves.png"/>
+          <p:cNvPicPr>
+            <a:picLocks noChangeAspect="1"/>
+          </p:cNvPicPr>
+          <p:nvPr/>
+        </p:nvPicPr>
+        <p:blipFill>
+          <a:blip r:embed="rId2"/>
+          <a:stretch>
+            <a:fillRect/>
+          </a:stretch>
+        </p:blipFill>
+        <p:spPr>
+          <a:xfrm>
+            <a:off x="914400" y="4297680"/>
+            <a:ext cx="4937760" cy="2743200"/>
+          </a:xfrm>
+          <a:prstGeom prst="rect">
+            <a:avLst/>
+          </a:prstGeom>
+        </p:spPr>
+      </p:pic>
+      <p:sp>
+        <p:nvSpPr>
+          <p:cNvPr id="9" name="Rounded Rectangle 8"/>
           <p:cNvSpPr/>
           <p:nvPr/>
         </p:nvSpPr>
         <p:spPr>
           <a:xfrm>
-            <a:off x="6126480" y="1463040"/>
-            <a:ext cx="5303520" cy="4754880"/>
+            <a:off x="6217920" y="1463040"/>
+            <a:ext cx="5212080" cy="4754880"/>
           </a:xfrm>
           <a:prstGeom prst="roundRect">
             <a:avLst/>
@@ -5463,14 +5975,14 @@
       </p:sp>
       <p:sp>
         <p:nvSpPr>
-          <p:cNvPr id="9" name="TextBox 8"/>
+          <p:cNvPr id="10" name="TextBox 9"/>
           <p:cNvSpPr txBox="1"/>
           <p:nvPr/>
         </p:nvSpPr>
         <p:spPr>
           <a:xfrm>
-            <a:off x="6309360" y="1600200"/>
-            <a:ext cx="4937759" cy="365760"/>
+            <a:off x="6400800" y="1600200"/>
+            <a:ext cx="4846320" cy="365760"/>
           </a:xfrm>
           <a:prstGeom prst="rect">
             <a:avLst/>
@@ -5491,21 +6003,21 @@
               </a:defRPr>
             </a:pPr>
             <a:r>
-              <a:t>Real-Time Population Drift Telemetry (PSI)</a:t>
-            </a:r>
-          </a:p>
-        </p:txBody>
-      </p:sp>
-      <p:sp>
-        <p:nvSpPr>
-          <p:cNvPr id="10" name="TextBox 9"/>
+              <a:t>2. Multi-Method Consensus &amp; Structured RAG</a:t>
+            </a:r>
+          </a:p>
+        </p:txBody>
+      </p:sp>
+      <p:sp>
+        <p:nvSpPr>
+          <p:cNvPr id="11" name="TextBox 10"/>
           <p:cNvSpPr txBox="1"/>
           <p:nvPr/>
         </p:nvSpPr>
         <p:spPr>
           <a:xfrm>
-            <a:off x="6309360" y="2011680"/>
-            <a:ext cx="4937760" cy="4023360"/>
+            <a:off x="6400800" y="2011680"/>
+            <a:ext cx="4846320" cy="4023360"/>
           </a:xfrm>
           <a:prstGeom prst="rect">
             <a:avLst/>
@@ -5513,113 +6025,179 @@
           <a:noFill/>
         </p:spPr>
         <p:txBody>
-          <a:bodyPr wrap="none">
+          <a:bodyPr wrap="square">
             <a:spAutoFit/>
           </a:bodyPr>
           <a:lstStyle/>
           <a:p>
             <a:pPr>
-              <a:defRPr sz="1150">
-                <a:solidFill>
-                  <a:srgbClr val="F8FAFC"/>
-                </a:solidFill>
-              </a:defRPr>
-            </a:pPr>
-            <a:r>
-              <a:t>• Continuous Population Stability Index (PSI) Monitoring:</a:t>
-            </a:r>
-          </a:p>
-          <a:p>
-            <a:pPr>
-              <a:defRPr sz="1150">
-                <a:solidFill>
-                  <a:srgbClr val="F8FAFC"/>
-                </a:solidFill>
-              </a:defRPr>
-            </a:pPr>
-            <a:r>
-              <a:t>  - Monitored across all 42 tabular features comparing live test inference against train baseline.</a:t>
-            </a:r>
-          </a:p>
-          <a:p>
-            <a:pPr>
-              <a:defRPr sz="1150">
-                <a:solidFill>
-                  <a:srgbClr val="F8FAFC"/>
-                </a:solidFill>
-              </a:defRPr>
-            </a:pPr>
-            <a:r>
-              <a:t>  - Max Feature PSI Observed: 0.0049 (Threshold: 0.10 stable).</a:t>
-            </a:r>
-          </a:p>
-          <a:p>
-            <a:pPr>
-              <a:defRPr sz="1150">
-                <a:solidFill>
-                  <a:srgbClr val="F8FAFC"/>
-                </a:solidFill>
-              </a:defRPr>
-            </a:pPr>
-            <a:r>
-              <a:t>  - Features with High Drift (&gt;0.25): 0 features.</a:t>
-            </a:r>
-          </a:p>
-          <a:p>
-            <a:pPr>
-              <a:defRPr sz="1150">
-                <a:solidFill>
-                  <a:srgbClr val="F8FAFC"/>
-                </a:solidFill>
-              </a:defRPr>
-            </a:pPr>
-            <a:r>
-              <a:t>  - Score Output PSI: 0.0000 (Zero drift).</a:t>
-            </a:r>
-          </a:p>
-          <a:p>
-            <a:pPr>
-              <a:defRPr sz="1150">
-                <a:solidFill>
-                  <a:srgbClr val="F8FAFC"/>
-                </a:solidFill>
-              </a:defRPr>
-            </a:pPr>
-          </a:p>
-          <a:p>
-            <a:pPr>
-              <a:defRPr sz="1150">
-                <a:solidFill>
-                  <a:srgbClr val="F8FAFC"/>
-                </a:solidFill>
-              </a:defRPr>
-            </a:pPr>
-            <a:r>
-              <a:t>• Deterministic Care Transitions (api/interventions.py):</a:t>
-            </a:r>
-          </a:p>
-          <a:p>
-            <a:pPr>
-              <a:defRPr sz="1150">
-                <a:solidFill>
-                  <a:srgbClr val="F8FAFC"/>
-                </a:solidFill>
-              </a:defRPr>
-            </a:pPr>
-            <a:r>
-              <a:t>  - Maps positive SHAP drivers to protocolized actions (pharmacist med review, 48h nurse call, home health).</a:t>
-            </a:r>
-          </a:p>
-          <a:p>
-            <a:pPr>
-              <a:defRPr sz="1150">
-                <a:solidFill>
-                  <a:srgbClr val="F8FAFC"/>
-                </a:solidFill>
-              </a:defRPr>
-            </a:pPr>
-            <a:r>
-              <a:t>  - Zero generative hallucination; regulation-ready governance.</a:t>
+              <a:defRPr sz="1050">
+                <a:solidFill>
+                  <a:srgbClr val="F8FAFC"/>
+                </a:solidFill>
+              </a:defRPr>
+            </a:pPr>
+            <a:r>
+              <a:t>Multi-Method Rank Agreement (Validation Cohort):</a:t>
+            </a:r>
+          </a:p>
+          <a:p>
+            <a:pPr>
+              <a:defRPr sz="1050">
+                <a:solidFill>
+                  <a:srgbClr val="F8FAFC"/>
+                </a:solidFill>
+              </a:defRPr>
+            </a:pPr>
+            <a:r>
+              <a:t>• TreeSHAP vs LightGBM Split Gain: Spearman rho = 0.953</a:t>
+            </a:r>
+          </a:p>
+          <a:p>
+            <a:pPr>
+              <a:defRPr sz="1050">
+                <a:solidFill>
+                  <a:srgbClr val="F8FAFC"/>
+                </a:solidFill>
+              </a:defRPr>
+            </a:pPr>
+            <a:r>
+              <a:t>• TreeSHAP vs Permutation Importance: Spearman rho = 0.885</a:t>
+            </a:r>
+          </a:p>
+          <a:p>
+            <a:pPr>
+              <a:defRPr sz="1050">
+                <a:solidFill>
+                  <a:srgbClr val="F8FAFC"/>
+                </a:solidFill>
+              </a:defRPr>
+            </a:pPr>
+            <a:r>
+              <a:t>• TreeSHAP vs Standardized Logistic Regression: rho = 0.121</a:t>
+            </a:r>
+          </a:p>
+          <a:p>
+            <a:pPr>
+              <a:defRPr sz="1050">
+                <a:solidFill>
+                  <a:srgbClr val="F8FAFC"/>
+                </a:solidFill>
+              </a:defRPr>
+            </a:pPr>
+            <a:r>
+              <a:t>  (Divergence with linear model demonstrates non-linear tree splits are essential).</a:t>
+            </a:r>
+          </a:p>
+          <a:p>
+            <a:pPr>
+              <a:defRPr sz="1050">
+                <a:solidFill>
+                  <a:srgbClr val="F8FAFC"/>
+                </a:solidFill>
+              </a:defRPr>
+            </a:pPr>
+          </a:p>
+          <a:p>
+            <a:pPr>
+              <a:defRPr sz="1050">
+                <a:solidFill>
+                  <a:srgbClr val="F8FAFC"/>
+                </a:solidFill>
+              </a:defRPr>
+            </a:pPr>
+            <a:r>
+              <a:t>Global Factor Ranking (#1 Prior Inpatient):</a:t>
+            </a:r>
+          </a:p>
+          <a:p>
+            <a:pPr>
+              <a:defRPr sz="1050">
+                <a:solidFill>
+                  <a:srgbClr val="F8FAFC"/>
+                </a:solidFill>
+              </a:defRPr>
+            </a:pPr>
+            <a:r>
+              <a:t>• Prior Inpatient Admissions: mean |SHAP| = 0.2168 [0.2124, 0.2212], 18.22% share.</a:t>
+            </a:r>
+          </a:p>
+          <a:p>
+            <a:pPr>
+              <a:defRPr sz="1050">
+                <a:solidFill>
+                  <a:srgbClr val="F8FAFC"/>
+                </a:solidFill>
+              </a:defRPr>
+            </a:pPr>
+          </a:p>
+          <a:p>
+            <a:pPr>
+              <a:defRPr sz="1050">
+                <a:solidFill>
+                  <a:srgbClr val="F8FAFC"/>
+                </a:solidFill>
+              </a:defRPr>
+            </a:pPr>
+            <a:r>
+              <a:t>The Structured RAG Finding in XAI:</a:t>
+            </a:r>
+          </a:p>
+          <a:p>
+            <a:pPr>
+              <a:defRPr sz="1050">
+                <a:solidFill>
+                  <a:srgbClr val="F8FAFC"/>
+                </a:solidFill>
+              </a:defRPr>
+            </a:pPr>
+            <a:r>
+              <a:t>• rag_struct_rate_k20 ranks #7 globally with 5.18% attribution share (mean |SHAP| = 0.0616).</a:t>
+            </a:r>
+          </a:p>
+          <a:p>
+            <a:pPr>
+              <a:defRPr sz="1050">
+                <a:solidFill>
+                  <a:srgbClr val="F8FAFC"/>
+                </a:solidFill>
+              </a:defRPr>
+            </a:pPr>
+            <a:r>
+              <a:t>• Connects to empirical ablation: RAG provides vital case precedent interpretability, even though paired test delta AUC is +0.0004 (CI crosses zero).</a:t>
+            </a:r>
+          </a:p>
+          <a:p>
+            <a:pPr>
+              <a:defRPr sz="1050">
+                <a:solidFill>
+                  <a:srgbClr val="F8FAFC"/>
+                </a:solidFill>
+              </a:defRPr>
+            </a:pPr>
+          </a:p>
+          <a:p>
+            <a:pPr>
+              <a:defRPr sz="1050">
+                <a:solidFill>
+                  <a:srgbClr val="F8FAFC"/>
+                </a:solidFill>
+              </a:defRPr>
+            </a:pPr>
+            <a:r>
+              <a:t>Monotonicity Audits:</a:t>
+            </a:r>
+          </a:p>
+          <a:p>
+            <a:pPr>
+              <a:defRPr sz="1050">
+                <a:solidFill>
+                  <a:srgbClr val="F8FAFC"/>
+                </a:solidFill>
+              </a:defRPr>
+            </a:pPr>
+            <a:r>
+              <a:t>• Prior inpatient and total prior visits confirmed 100% monotonic.</a:t>
             </a:r>
           </a:p>
         </p:txBody>
@@ -5715,7 +6293,7 @@
               </a:defRPr>
             </a:pPr>
             <a:r>
-              <a:t>11. LIMITATIONS &amp; ETHICAL GOVERNANCE</a:t>
+              <a:t>09. PRODUCT DEMO &amp; DISCHARGE WORKFLOW</a:t>
             </a:r>
           </a:p>
         </p:txBody>
@@ -5750,7 +6328,7 @@
               </a:defRPr>
             </a:pPr>
             <a:r>
-              <a:t>Clinical Limitations &amp; Responsible Governance</a:t>
+              <a:t>Discharge Desk &amp; Encounter Brief: Clinical Command UX</a:t>
             </a:r>
           </a:p>
         </p:txBody>
@@ -5830,7 +6408,7 @@
               </a:defRPr>
             </a:pPr>
             <a:r>
-              <a:t>Known Empirical &amp; Data Limitations</a:t>
+              <a:t>1. Live Discharge Desk &amp; Capacity Triage</a:t>
             </a:r>
           </a:p>
         </p:txBody>
@@ -5843,8 +6421,8 @@
         </p:nvSpPr>
         <p:spPr>
           <a:xfrm>
-            <a:off x="914400" y="2011680"/>
-            <a:ext cx="4754880" cy="4023360"/>
+            <a:off x="914400" y="4663440"/>
+            <a:ext cx="4754880" cy="1371600"/>
           </a:xfrm>
           <a:prstGeom prst="rect">
             <a:avLst/>
@@ -5858,125 +6436,50 @@
           <a:lstStyle/>
           <a:p>
             <a:pPr>
-              <a:defRPr sz="1150">
-                <a:solidFill>
-                  <a:srgbClr val="F8FAFC"/>
-                </a:solidFill>
-              </a:defRPr>
-            </a:pPr>
-            <a:r>
-              <a:t>1. Historical Era (1999–2008):</a:t>
-            </a:r>
-          </a:p>
-          <a:p>
-            <a:pPr>
-              <a:defRPr sz="1150">
-                <a:solidFill>
-                  <a:srgbClr val="F8FAFC"/>
-                </a:solidFill>
-              </a:defRPr>
-            </a:pPr>
-            <a:r>
-              <a:t>   Modern diabetes therapies (GLP-1 receptor agonists, SGLT-2 inhibitors) were not standard of care in this dataset.</a:t>
-            </a:r>
-          </a:p>
-          <a:p>
-            <a:pPr>
-              <a:defRPr sz="1150">
-                <a:solidFill>
-                  <a:srgbClr val="F8FAFC"/>
-                </a:solidFill>
-              </a:defRPr>
-            </a:pPr>
-          </a:p>
-          <a:p>
-            <a:pPr>
-              <a:defRPr sz="1150">
-                <a:solidFill>
-                  <a:srgbClr val="F8FAFC"/>
-                </a:solidFill>
-              </a:defRPr>
-            </a:pPr>
-            <a:r>
-              <a:t>2. Single-Network Censoring:</a:t>
-            </a:r>
-          </a:p>
-          <a:p>
-            <a:pPr>
-              <a:defRPr sz="1150">
-                <a:solidFill>
-                  <a:srgbClr val="F8FAFC"/>
-                </a:solidFill>
-              </a:defRPr>
-            </a:pPr>
-            <a:r>
-              <a:t>   Readmissions to outside hospital networks were unobserved. True population readmission rate is higher.</a:t>
-            </a:r>
-          </a:p>
-          <a:p>
-            <a:pPr>
-              <a:defRPr sz="1150">
-                <a:solidFill>
-                  <a:srgbClr val="F8FAFC"/>
-                </a:solidFill>
-              </a:defRPr>
-            </a:pPr>
-          </a:p>
-          <a:p>
-            <a:pPr>
-              <a:defRPr sz="1150">
-                <a:solidFill>
-                  <a:srgbClr val="F8FAFC"/>
-                </a:solidFill>
-              </a:defRPr>
-            </a:pPr>
-            <a:r>
-              <a:t>3. Coarse Laboratory Signal:</a:t>
-            </a:r>
-          </a:p>
-          <a:p>
-            <a:pPr>
-              <a:defRPr sz="1150">
-                <a:solidFill>
-                  <a:srgbClr val="F8FAFC"/>
-                </a:solidFill>
-              </a:defRPr>
-            </a:pPr>
-            <a:r>
-              <a:t>   A1C and glucose are categorical (&gt;8, Normal, None); vitals, BMI, and social determinants of health were not captured.</a:t>
-            </a:r>
-          </a:p>
-          <a:p>
-            <a:pPr>
-              <a:defRPr sz="1150">
-                <a:solidFill>
-                  <a:srgbClr val="F8FAFC"/>
-                </a:solidFill>
-              </a:defRPr>
-            </a:pPr>
-          </a:p>
-          <a:p>
-            <a:pPr>
-              <a:defRPr sz="1150">
-                <a:solidFill>
-                  <a:srgbClr val="F8FAFC"/>
-                </a:solidFill>
-              </a:defRPr>
-            </a:pPr>
-            <a:r>
-              <a:t>4. Bounded Discrimination:</a:t>
-            </a:r>
-          </a:p>
-          <a:p>
-            <a:pPr>
-              <a:defRPr sz="1150">
-                <a:solidFill>
-                  <a:srgbClr val="F8FAFC"/>
-                </a:solidFill>
-              </a:defRPr>
-            </a:pPr>
-            <a:r>
-              <a:t>   Test AUC is 0.6590. It is an operational prioritization tool, not a diagnostic oracle.</a:t>
+              <a:defRPr sz="1050">
+                <a:solidFill>
+                  <a:srgbClr val="F8FAFC"/>
+                </a:solidFill>
+              </a:defRPr>
+            </a:pPr>
+            <a:r>
+              <a:t>• Live worklist polling every 3s ranked strictly by raw model score.</a:t>
+            </a:r>
+          </a:p>
+          <a:p>
+            <a:pPr>
+              <a:defRPr sz="1050">
+                <a:solidFill>
+                  <a:srgbClr val="F8FAFC"/>
+                </a:solidFill>
+              </a:defRPr>
+            </a:pPr>
+            <a:r>
+              <a:t>• Animated odometers (triage queue, critical/high counts, resolved outcomes).</a:t>
+            </a:r>
+          </a:p>
+          <a:p>
+            <a:pPr>
+              <a:defRPr sz="1050">
+                <a:solidFill>
+                  <a:srgbClr val="F8FAFC"/>
+                </a:solidFill>
+              </a:defRPr>
+            </a:pPr>
+            <a:r>
+              <a:t>• Capacity Mode: 'I can follow up N patients today' dynamically highlights top yield cases.</a:t>
+            </a:r>
+          </a:p>
+          <a:p>
+            <a:pPr>
+              <a:defRPr sz="1050">
+                <a:solidFill>
+                  <a:srgbClr val="F8FAFC"/>
+                </a:solidFill>
+              </a:defRPr>
+            </a:pPr>
+            <a:r>
+              <a:t>• Full keyboard navigation (j/k, Enter) with inline status transitions.</a:t>
             </a:r>
           </a:p>
         </p:txBody>
@@ -6056,7 +6559,7 @@
               </a:defRPr>
             </a:pPr>
             <a:r>
-              <a:t>Responsible Deployment Principles</a:t>
+              <a:t>2. Calibrated Encounter Brief &amp; Precedent Orbit</a:t>
             </a:r>
           </a:p>
         </p:txBody>
@@ -6069,8 +6572,8 @@
         </p:nvSpPr>
         <p:spPr>
           <a:xfrm>
-            <a:off x="6309360" y="2011680"/>
-            <a:ext cx="4937760" cy="4023360"/>
+            <a:off x="6309360" y="4663440"/>
+            <a:ext cx="4937760" cy="1371600"/>
           </a:xfrm>
           <a:prstGeom prst="rect">
             <a:avLst/>
@@ -6084,125 +6587,50 @@
           <a:lstStyle/>
           <a:p>
             <a:pPr>
-              <a:defRPr sz="1150">
-                <a:solidFill>
-                  <a:srgbClr val="F8FAFC"/>
-                </a:solidFill>
-              </a:defRPr>
-            </a:pPr>
-            <a:r>
-              <a:t>• Human-in-the-Loop Safeguard:</a:t>
-            </a:r>
-          </a:p>
-          <a:p>
-            <a:pPr>
-              <a:defRPr sz="1150">
-                <a:solidFill>
-                  <a:srgbClr val="F8FAFC"/>
-                </a:solidFill>
-              </a:defRPr>
-            </a:pPr>
-            <a:r>
-              <a:t>  ReadmitIQ provides decision support, never automated order placement. All care transitions require clinician sign-off.</a:t>
-            </a:r>
-          </a:p>
-          <a:p>
-            <a:pPr>
-              <a:defRPr sz="1150">
-                <a:solidFill>
-                  <a:srgbClr val="F8FAFC"/>
-                </a:solidFill>
-              </a:defRPr>
-            </a:pPr>
-          </a:p>
-          <a:p>
-            <a:pPr>
-              <a:defRPr sz="1150">
-                <a:solidFill>
-                  <a:srgbClr val="F8FAFC"/>
-                </a:solidFill>
-              </a:defRPr>
-            </a:pPr>
-            <a:r>
-              <a:t>• Prominent Clinical Disclaimer:</a:t>
-            </a:r>
-          </a:p>
-          <a:p>
-            <a:pPr>
-              <a:defRPr sz="1150">
-                <a:solidFill>
-                  <a:srgbClr val="F8FAFC"/>
-                </a:solidFill>
-              </a:defRPr>
-            </a:pPr>
-            <a:r>
-              <a:t>  Displayed on every screen: 'Decision-support suggestions, not clinical advice. Clinical judgment supersedes algorithmic output.'</a:t>
-            </a:r>
-          </a:p>
-          <a:p>
-            <a:pPr>
-              <a:defRPr sz="1150">
-                <a:solidFill>
-                  <a:srgbClr val="F8FAFC"/>
-                </a:solidFill>
-              </a:defRPr>
-            </a:pPr>
-          </a:p>
-          <a:p>
-            <a:pPr>
-              <a:defRPr sz="1150">
-                <a:solidFill>
-                  <a:srgbClr val="F8FAFC"/>
-                </a:solidFill>
-              </a:defRPr>
-            </a:pPr>
-            <a:r>
-              <a:t>• Fairness Safeguard:</a:t>
-            </a:r>
-          </a:p>
-          <a:p>
-            <a:pPr>
-              <a:defRPr sz="1150">
-                <a:solidFill>
-                  <a:srgbClr val="F8FAFC"/>
-                </a:solidFill>
-              </a:defRPr>
-            </a:pPr>
-            <a:r>
-              <a:t>  Demographic-blinded model option ensures institutions can operate without demographic inputs.</a:t>
-            </a:r>
-          </a:p>
-          <a:p>
-            <a:pPr>
-              <a:defRPr sz="1150">
-                <a:solidFill>
-                  <a:srgbClr val="F8FAFC"/>
-                </a:solidFill>
-              </a:defRPr>
-            </a:pPr>
-          </a:p>
-          <a:p>
-            <a:pPr>
-              <a:defRPr sz="1150">
-                <a:solidFill>
-                  <a:srgbClr val="F8FAFC"/>
-                </a:solidFill>
-              </a:defRPr>
-            </a:pPr>
-            <a:r>
-              <a:t>• Fail-Safe Degradation:</a:t>
-            </a:r>
-          </a:p>
-          <a:p>
-            <a:pPr>
-              <a:defRPr sz="1150">
-                <a:solidFill>
-                  <a:srgbClr val="F8FAFC"/>
-                </a:solidFill>
-              </a:defRPr>
-            </a:pPr>
-            <a:r>
-              <a:t>  If the retriever fails or latency exceeds 1s, system gracefully falls back to base calibrated LightGBM scoring.</a:t>
+              <a:defRPr sz="1050">
+                <a:solidFill>
+                  <a:srgbClr val="F8FAFC"/>
+                </a:solidFill>
+              </a:defRPr>
+            </a:pPr>
+            <a:r>
+              <a:t>• Calibrated Risk Dial: Isotonic probability mapped to 4 actionable clinical tiers.</a:t>
+            </a:r>
+          </a:p>
+          <a:p>
+            <a:pPr>
+              <a:defRPr sz="1050">
+                <a:solidFill>
+                  <a:srgbClr val="F8FAFC"/>
+                </a:solidFill>
+              </a:defRPr>
+            </a:pPr>
+            <a:r>
+              <a:t>• Precedent Orbit: 20 historical neighbors (d = 1 - sim) with Wilson 95% CI readmission rate.</a:t>
+            </a:r>
+          </a:p>
+          <a:p>
+            <a:pPr>
+              <a:defRPr sz="1050">
+                <a:solidFill>
+                  <a:srgbClr val="F8FAFC"/>
+                </a:solidFill>
+              </a:defRPr>
+            </a:pPr>
+            <a:r>
+              <a:t>• Top SHAP log-odds drivers + clinical sensitivity lab for counterfactual what-ifs.</a:t>
+            </a:r>
+          </a:p>
+          <a:p>
+            <a:pPr>
+              <a:defRPr sz="1050">
+                <a:solidFill>
+                  <a:srgbClr val="F8FAFC"/>
+                </a:solidFill>
+              </a:defRPr>
+            </a:pPr>
+            <a:r>
+              <a:t>• Protocolized care timeline (48h, 7d, 30d) with clinician override audit log.</a:t>
             </a:r>
           </a:p>
         </p:txBody>
@@ -6298,7 +6726,7 @@
               </a:defRPr>
             </a:pPr>
             <a:r>
-              <a:t>12. TEAMWORK &amp; OWNERSHIP DIVISION</a:t>
+              <a:t>10. LIVE INFERENCE &amp; POPULATION STABILITY</a:t>
             </a:r>
           </a:p>
         </p:txBody>
@@ -6333,7 +6761,7 @@
               </a:defRPr>
             </a:pPr>
             <a:r>
-              <a:t>Interdisciplinary Team Structure &amp; Execution</a:t>
+              <a:t>Live Scoring Pipeline &amp; Real-Time Operational Monitoring</a:t>
             </a:r>
           </a:p>
         </p:txBody>
@@ -6347,7 +6775,7 @@
         <p:spPr>
           <a:xfrm>
             <a:off x="731520" y="1463040"/>
-            <a:ext cx="5120640" cy="1143000"/>
+            <a:ext cx="5120640" cy="4754880"/>
           </a:xfrm>
           <a:prstGeom prst="roundRect">
             <a:avLst/>
@@ -6413,7 +6841,7 @@
               </a:defRPr>
             </a:pPr>
             <a:r>
-              <a:t>Member 1: Clinical Product &amp; Problem Formulation</a:t>
+              <a:t>Live Monitoring Telemetry &amp; Drift Detection</a:t>
             </a:r>
           </a:p>
         </p:txBody>
@@ -6426,8 +6854,8 @@
         </p:nvSpPr>
         <p:spPr>
           <a:xfrm>
-            <a:off x="868680" y="1874520"/>
-            <a:ext cx="4846320" cy="685800"/>
+            <a:off x="914400" y="4663440"/>
+            <a:ext cx="4754880" cy="1371600"/>
           </a:xfrm>
           <a:prstGeom prst="rect">
             <a:avLst/>
@@ -6448,7 +6876,43 @@
               </a:defRPr>
             </a:pPr>
             <a:r>
-              <a:t>Clinical workflow framing, operational capacity economics, and medical metric alignment.</a:t>
+              <a:t>• Real-time tier mix tracking against baseline training distribution.</a:t>
+            </a:r>
+          </a:p>
+          <a:p>
+            <a:pPr>
+              <a:defRPr sz="1050">
+                <a:solidFill>
+                  <a:srgbClr val="F8FAFC"/>
+                </a:solidFill>
+              </a:defRPr>
+            </a:pPr>
+            <a:r>
+              <a:t>• Raw-score &amp; feature PSI continuous calculation with 0.10 and 0.25 guidelines.</a:t>
+            </a:r>
+          </a:p>
+          <a:p>
+            <a:pPr>
+              <a:defRPr sz="1050">
+                <a:solidFill>
+                  <a:srgbClr val="F8FAFC"/>
+                </a:solidFill>
+              </a:defRPr>
+            </a:pPr>
+            <a:r>
+              <a:t>• Automated drift alert engine flags incoming distribution anomalies.</a:t>
+            </a:r>
+          </a:p>
+          <a:p>
+            <a:pPr>
+              <a:defRPr sz="1050">
+                <a:solidFill>
+                  <a:srgbClr val="F8FAFC"/>
+                </a:solidFill>
+              </a:defRPr>
+            </a:pPr>
+            <a:r>
+              <a:t>• Fallback safe state ('insufficient outcomes n=...') until 30-day outcomes arrive.</a:t>
             </a:r>
           </a:p>
         </p:txBody>
@@ -6462,7 +6926,7 @@
         <p:spPr>
           <a:xfrm>
             <a:off x="6126480" y="1463040"/>
-            <a:ext cx="5120640" cy="1143000"/>
+            <a:ext cx="5303520" cy="4754880"/>
           </a:xfrm>
           <a:prstGeom prst="roundRect">
             <a:avLst/>
@@ -6507,7 +6971,7 @@
         <p:spPr>
           <a:xfrm>
             <a:off x="6309360" y="1600200"/>
-            <a:ext cx="4754879" cy="365760"/>
+            <a:ext cx="4937759" cy="365760"/>
           </a:xfrm>
           <a:prstGeom prst="rect">
             <a:avLst/>
@@ -6528,7 +6992,7 @@
               </a:defRPr>
             </a:pPr>
             <a:r>
-              <a:t>Member 2: Data Engineering &amp; Leakage Isolation</a:t>
+              <a:t>Live Scoring Engine &amp; Time Machine Verification</a:t>
             </a:r>
           </a:p>
         </p:txBody>
@@ -6541,8 +7005,8 @@
         </p:nvSpPr>
         <p:spPr>
           <a:xfrm>
-            <a:off x="6263640" y="1874520"/>
-            <a:ext cx="4846320" cy="685800"/>
+            <a:off x="6309360" y="2011680"/>
+            <a:ext cx="4937760" cy="4023360"/>
           </a:xfrm>
           <a:prstGeom prst="rect">
             <a:avLst/>
@@ -6556,589 +7020,125 @@
           <a:lstStyle/>
           <a:p>
             <a:pPr>
-              <a:defRPr sz="1050">
-                <a:solidFill>
-                  <a:srgbClr val="F8FAFC"/>
-                </a:solidFill>
-              </a:defRPr>
-            </a:pPr>
-            <a:r>
-              <a:t>Grouped patient hash splitting, UCI data pipeline, and zero-leakage mathematical guarantees.</a:t>
-            </a:r>
-          </a:p>
-        </p:txBody>
-      </p:sp>
-      <p:sp>
-        <p:nvSpPr>
-          <p:cNvPr id="11" name="Rounded Rectangle 10"/>
-          <p:cNvSpPr/>
-          <p:nvPr/>
-        </p:nvSpPr>
-        <p:spPr>
-          <a:xfrm>
-            <a:off x="731520" y="2697480"/>
-            <a:ext cx="5120640" cy="1143000"/>
-          </a:xfrm>
-          <a:prstGeom prst="roundRect">
-            <a:avLst/>
-          </a:prstGeom>
-          <a:solidFill>
-            <a:srgbClr val="1E293B"/>
-          </a:solidFill>
-          <a:ln w="19050">
-            <a:solidFill>
-              <a:srgbClr val="334155"/>
-            </a:solidFill>
-          </a:ln>
-        </p:spPr>
-        <p:style>
-          <a:lnRef idx="1">
-            <a:schemeClr val="accent1"/>
-          </a:lnRef>
-          <a:fillRef idx="3">
-            <a:schemeClr val="accent1"/>
-          </a:fillRef>
-          <a:effectRef idx="2">
-            <a:schemeClr val="accent1"/>
-          </a:effectRef>
-          <a:fontRef idx="minor">
-            <a:schemeClr val="lt1"/>
-          </a:fontRef>
-        </p:style>
-        <p:txBody>
-          <a:bodyPr rtlCol="0" anchor="ctr"/>
-          <a:lstStyle/>
-          <a:p>
-            <a:pPr algn="ctr"/>
-          </a:p>
-        </p:txBody>
-      </p:sp>
-      <p:sp>
-        <p:nvSpPr>
-          <p:cNvPr id="12" name="TextBox 11"/>
-          <p:cNvSpPr txBox="1"/>
-          <p:nvPr/>
-        </p:nvSpPr>
-        <p:spPr>
-          <a:xfrm>
-            <a:off x="914400" y="2834640"/>
-            <a:ext cx="4754879" cy="365760"/>
-          </a:xfrm>
-          <a:prstGeom prst="rect">
-            <a:avLst/>
-          </a:prstGeom>
-          <a:noFill/>
-        </p:spPr>
-        <p:txBody>
-          <a:bodyPr wrap="none">
-            <a:spAutoFit/>
-          </a:bodyPr>
-          <a:lstStyle/>
-          <a:p>
-            <a:pPr>
-              <a:defRPr sz="1300" b="1">
-                <a:solidFill>
-                  <a:srgbClr val="0EA5E9"/>
-                </a:solidFill>
-              </a:defRPr>
-            </a:pPr>
-            <a:r>
-              <a:t>Member 3: Machine Learning &amp; Probability Calibration</a:t>
-            </a:r>
-          </a:p>
-        </p:txBody>
-      </p:sp>
-      <p:sp>
-        <p:nvSpPr>
-          <p:cNvPr id="13" name="TextBox 12"/>
-          <p:cNvSpPr txBox="1"/>
-          <p:nvPr/>
-        </p:nvSpPr>
-        <p:spPr>
-          <a:xfrm>
-            <a:off x="868680" y="3108960"/>
-            <a:ext cx="4846320" cy="685800"/>
-          </a:xfrm>
-          <a:prstGeom prst="rect">
-            <a:avLst/>
-          </a:prstGeom>
-          <a:noFill/>
-        </p:spPr>
-        <p:txBody>
-          <a:bodyPr wrap="square">
-            <a:spAutoFit/>
-          </a:bodyPr>
-          <a:lstStyle/>
-          <a:p>
-            <a:pPr>
-              <a:defRPr sz="1050">
-                <a:solidFill>
-                  <a:srgbClr val="F8FAFC"/>
-                </a:solidFill>
-              </a:defRPr>
-            </a:pPr>
-            <a:r>
-              <a:t>Algorithm benchmarking, LightGBM tuning, Isotonic calibration, and 95% bootstrap CIs.</a:t>
-            </a:r>
-          </a:p>
-        </p:txBody>
-      </p:sp>
-      <p:sp>
-        <p:nvSpPr>
-          <p:cNvPr id="14" name="Rounded Rectangle 13"/>
-          <p:cNvSpPr/>
-          <p:nvPr/>
-        </p:nvSpPr>
-        <p:spPr>
-          <a:xfrm>
-            <a:off x="6126480" y="2697480"/>
-            <a:ext cx="5120640" cy="1143000"/>
-          </a:xfrm>
-          <a:prstGeom prst="roundRect">
-            <a:avLst/>
-          </a:prstGeom>
-          <a:solidFill>
-            <a:srgbClr val="1E293B"/>
-          </a:solidFill>
-          <a:ln w="19050">
-            <a:solidFill>
-              <a:srgbClr val="334155"/>
-            </a:solidFill>
-          </a:ln>
-        </p:spPr>
-        <p:style>
-          <a:lnRef idx="1">
-            <a:schemeClr val="accent1"/>
-          </a:lnRef>
-          <a:fillRef idx="3">
-            <a:schemeClr val="accent1"/>
-          </a:fillRef>
-          <a:effectRef idx="2">
-            <a:schemeClr val="accent1"/>
-          </a:effectRef>
-          <a:fontRef idx="minor">
-            <a:schemeClr val="lt1"/>
-          </a:fontRef>
-        </p:style>
-        <p:txBody>
-          <a:bodyPr rtlCol="0" anchor="ctr"/>
-          <a:lstStyle/>
-          <a:p>
-            <a:pPr algn="ctr"/>
-          </a:p>
-        </p:txBody>
-      </p:sp>
-      <p:sp>
-        <p:nvSpPr>
-          <p:cNvPr id="15" name="TextBox 14"/>
-          <p:cNvSpPr txBox="1"/>
-          <p:nvPr/>
-        </p:nvSpPr>
-        <p:spPr>
-          <a:xfrm>
-            <a:off x="6309360" y="2834640"/>
-            <a:ext cx="4754879" cy="365760"/>
-          </a:xfrm>
-          <a:prstGeom prst="rect">
-            <a:avLst/>
-          </a:prstGeom>
-          <a:noFill/>
-        </p:spPr>
-        <p:txBody>
-          <a:bodyPr wrap="none">
-            <a:spAutoFit/>
-          </a:bodyPr>
-          <a:lstStyle/>
-          <a:p>
-            <a:pPr>
-              <a:defRPr sz="1300" b="1">
-                <a:solidFill>
-                  <a:srgbClr val="0EA5E9"/>
-                </a:solidFill>
-              </a:defRPr>
-            </a:pPr>
-            <a:r>
-              <a:t>Member 4: Structured RAG &amp; Precedent Retrieval</a:t>
-            </a:r>
-          </a:p>
-        </p:txBody>
-      </p:sp>
-      <p:sp>
-        <p:nvSpPr>
-          <p:cNvPr id="16" name="TextBox 15"/>
-          <p:cNvSpPr txBox="1"/>
-          <p:nvPr/>
-        </p:nvSpPr>
-        <p:spPr>
-          <a:xfrm>
-            <a:off x="6263640" y="3108960"/>
-            <a:ext cx="4846320" cy="685800"/>
-          </a:xfrm>
-          <a:prstGeom prst="rect">
-            <a:avLst/>
-          </a:prstGeom>
-          <a:noFill/>
-        </p:spPr>
-        <p:txBody>
-          <a:bodyPr wrap="square">
-            <a:spAutoFit/>
-          </a:bodyPr>
-          <a:lstStyle/>
-          <a:p>
-            <a:pPr>
-              <a:defRPr sz="1050">
-                <a:solidFill>
-                  <a:srgbClr val="F8FAFC"/>
-                </a:solidFill>
-              </a:defRPr>
-            </a:pPr>
-            <a:r>
-              <a:t>64-dim clinical latent SVD space, FAISS inner-product indexing, and OOF cross-validation.</a:t>
-            </a:r>
-          </a:p>
-        </p:txBody>
-      </p:sp>
-      <p:sp>
-        <p:nvSpPr>
-          <p:cNvPr id="17" name="Rounded Rectangle 16"/>
-          <p:cNvSpPr/>
-          <p:nvPr/>
-        </p:nvSpPr>
-        <p:spPr>
-          <a:xfrm>
-            <a:off x="731520" y="3931920"/>
-            <a:ext cx="5120640" cy="1143000"/>
-          </a:xfrm>
-          <a:prstGeom prst="roundRect">
-            <a:avLst/>
-          </a:prstGeom>
-          <a:solidFill>
-            <a:srgbClr val="1E293B"/>
-          </a:solidFill>
-          <a:ln w="19050">
-            <a:solidFill>
-              <a:srgbClr val="334155"/>
-            </a:solidFill>
-          </a:ln>
-        </p:spPr>
-        <p:style>
-          <a:lnRef idx="1">
-            <a:schemeClr val="accent1"/>
-          </a:lnRef>
-          <a:fillRef idx="3">
-            <a:schemeClr val="accent1"/>
-          </a:fillRef>
-          <a:effectRef idx="2">
-            <a:schemeClr val="accent1"/>
-          </a:effectRef>
-          <a:fontRef idx="minor">
-            <a:schemeClr val="lt1"/>
-          </a:fontRef>
-        </p:style>
-        <p:txBody>
-          <a:bodyPr rtlCol="0" anchor="ctr"/>
-          <a:lstStyle/>
-          <a:p>
-            <a:pPr algn="ctr"/>
-          </a:p>
-        </p:txBody>
-      </p:sp>
-      <p:sp>
-        <p:nvSpPr>
-          <p:cNvPr id="18" name="TextBox 17"/>
-          <p:cNvSpPr txBox="1"/>
-          <p:nvPr/>
-        </p:nvSpPr>
-        <p:spPr>
-          <a:xfrm>
-            <a:off x="914400" y="4069080"/>
-            <a:ext cx="4754879" cy="365760"/>
-          </a:xfrm>
-          <a:prstGeom prst="rect">
-            <a:avLst/>
-          </a:prstGeom>
-          <a:noFill/>
-        </p:spPr>
-        <p:txBody>
-          <a:bodyPr wrap="none">
-            <a:spAutoFit/>
-          </a:bodyPr>
-          <a:lstStyle/>
-          <a:p>
-            <a:pPr>
-              <a:defRPr sz="1300" b="1">
-                <a:solidFill>
-                  <a:srgbClr val="0EA5E9"/>
-                </a:solidFill>
-              </a:defRPr>
-            </a:pPr>
-            <a:r>
-              <a:t>Member 5: Explainability, Fairness &amp; Governance</a:t>
-            </a:r>
-          </a:p>
-        </p:txBody>
-      </p:sp>
-      <p:sp>
-        <p:nvSpPr>
-          <p:cNvPr id="19" name="TextBox 18"/>
-          <p:cNvSpPr txBox="1"/>
-          <p:nvPr/>
-        </p:nvSpPr>
-        <p:spPr>
-          <a:xfrm>
-            <a:off x="868680" y="4343400"/>
-            <a:ext cx="4846320" cy="685800"/>
-          </a:xfrm>
-          <a:prstGeom prst="rect">
-            <a:avLst/>
-          </a:prstGeom>
-          <a:noFill/>
-        </p:spPr>
-        <p:txBody>
-          <a:bodyPr wrap="square">
-            <a:spAutoFit/>
-          </a:bodyPr>
-          <a:lstStyle/>
-          <a:p>
-            <a:pPr>
-              <a:defRPr sz="1050">
-                <a:solidFill>
-                  <a:srgbClr val="F8FAFC"/>
-                </a:solidFill>
-              </a:defRPr>
-            </a:pPr>
-            <a:r>
-              <a:t>TreeSHAP local attributions, demographic-blinded model audit, and 42-feature PSI monitoring.</a:t>
-            </a:r>
-          </a:p>
-        </p:txBody>
-      </p:sp>
-      <p:sp>
-        <p:nvSpPr>
-          <p:cNvPr id="20" name="Rounded Rectangle 19"/>
-          <p:cNvSpPr/>
-          <p:nvPr/>
-        </p:nvSpPr>
-        <p:spPr>
-          <a:xfrm>
-            <a:off x="6126480" y="3931920"/>
-            <a:ext cx="5120640" cy="1143000"/>
-          </a:xfrm>
-          <a:prstGeom prst="roundRect">
-            <a:avLst/>
-          </a:prstGeom>
-          <a:solidFill>
-            <a:srgbClr val="1E293B"/>
-          </a:solidFill>
-          <a:ln w="19050">
-            <a:solidFill>
-              <a:srgbClr val="334155"/>
-            </a:solidFill>
-          </a:ln>
-        </p:spPr>
-        <p:style>
-          <a:lnRef idx="1">
-            <a:schemeClr val="accent1"/>
-          </a:lnRef>
-          <a:fillRef idx="3">
-            <a:schemeClr val="accent1"/>
-          </a:fillRef>
-          <a:effectRef idx="2">
-            <a:schemeClr val="accent1"/>
-          </a:effectRef>
-          <a:fontRef idx="minor">
-            <a:schemeClr val="lt1"/>
-          </a:fontRef>
-        </p:style>
-        <p:txBody>
-          <a:bodyPr rtlCol="0" anchor="ctr"/>
-          <a:lstStyle/>
-          <a:p>
-            <a:pPr algn="ctr"/>
-          </a:p>
-        </p:txBody>
-      </p:sp>
-      <p:sp>
-        <p:nvSpPr>
-          <p:cNvPr id="21" name="TextBox 20"/>
-          <p:cNvSpPr txBox="1"/>
-          <p:nvPr/>
-        </p:nvSpPr>
-        <p:spPr>
-          <a:xfrm>
-            <a:off x="6309360" y="4069080"/>
-            <a:ext cx="4754879" cy="365760"/>
-          </a:xfrm>
-          <a:prstGeom prst="rect">
-            <a:avLst/>
-          </a:prstGeom>
-          <a:noFill/>
-        </p:spPr>
-        <p:txBody>
-          <a:bodyPr wrap="none">
-            <a:spAutoFit/>
-          </a:bodyPr>
-          <a:lstStyle/>
-          <a:p>
-            <a:pPr>
-              <a:defRPr sz="1300" b="1">
-                <a:solidFill>
-                  <a:srgbClr val="0EA5E9"/>
-                </a:solidFill>
-              </a:defRPr>
-            </a:pPr>
-            <a:r>
-              <a:t>Member 6: Full-Stack Web Command Center</a:t>
-            </a:r>
-          </a:p>
-        </p:txBody>
-      </p:sp>
-      <p:sp>
-        <p:nvSpPr>
-          <p:cNvPr id="22" name="TextBox 21"/>
-          <p:cNvSpPr txBox="1"/>
-          <p:nvPr/>
-        </p:nvSpPr>
-        <p:spPr>
-          <a:xfrm>
-            <a:off x="6263640" y="4343400"/>
-            <a:ext cx="4846320" cy="685800"/>
-          </a:xfrm>
-          <a:prstGeom prst="rect">
-            <a:avLst/>
-          </a:prstGeom>
-          <a:noFill/>
-        </p:spPr>
-        <p:txBody>
-          <a:bodyPr wrap="square">
-            <a:spAutoFit/>
-          </a:bodyPr>
-          <a:lstStyle/>
-          <a:p>
-            <a:pPr>
-              <a:defRPr sz="1050">
-                <a:solidFill>
-                  <a:srgbClr val="F8FAFC"/>
-                </a:solidFill>
-              </a:defRPr>
-            </a:pPr>
-            <a:r>
-              <a:t>React 19 + TypeScript + Vite SPA, responsive clinical design tokens, and interactive ROI simulator.</a:t>
-            </a:r>
-          </a:p>
-        </p:txBody>
-      </p:sp>
-      <p:sp>
-        <p:nvSpPr>
-          <p:cNvPr id="23" name="Rounded Rectangle 22"/>
-          <p:cNvSpPr/>
-          <p:nvPr/>
-        </p:nvSpPr>
-        <p:spPr>
-          <a:xfrm>
-            <a:off x="731520" y="5166360"/>
-            <a:ext cx="5120640" cy="1143000"/>
-          </a:xfrm>
-          <a:prstGeom prst="roundRect">
-            <a:avLst/>
-          </a:prstGeom>
-          <a:solidFill>
-            <a:srgbClr val="1E293B"/>
-          </a:solidFill>
-          <a:ln w="19050">
-            <a:solidFill>
-              <a:srgbClr val="334155"/>
-            </a:solidFill>
-          </a:ln>
-        </p:spPr>
-        <p:style>
-          <a:lnRef idx="1">
-            <a:schemeClr val="accent1"/>
-          </a:lnRef>
-          <a:fillRef idx="3">
-            <a:schemeClr val="accent1"/>
-          </a:fillRef>
-          <a:effectRef idx="2">
-            <a:schemeClr val="accent1"/>
-          </a:effectRef>
-          <a:fontRef idx="minor">
-            <a:schemeClr val="lt1"/>
-          </a:fontRef>
-        </p:style>
-        <p:txBody>
-          <a:bodyPr rtlCol="0" anchor="ctr"/>
-          <a:lstStyle/>
-          <a:p>
-            <a:pPr algn="ctr"/>
-          </a:p>
-        </p:txBody>
-      </p:sp>
-      <p:sp>
-        <p:nvSpPr>
-          <p:cNvPr id="24" name="TextBox 23"/>
-          <p:cNvSpPr txBox="1"/>
-          <p:nvPr/>
-        </p:nvSpPr>
-        <p:spPr>
-          <a:xfrm>
-            <a:off x="914400" y="5303520"/>
-            <a:ext cx="4754879" cy="365760"/>
-          </a:xfrm>
-          <a:prstGeom prst="rect">
-            <a:avLst/>
-          </a:prstGeom>
-          <a:noFill/>
-        </p:spPr>
-        <p:txBody>
-          <a:bodyPr wrap="none">
-            <a:spAutoFit/>
-          </a:bodyPr>
-          <a:lstStyle/>
-          <a:p>
-            <a:pPr>
-              <a:defRPr sz="1300" b="1">
-                <a:solidFill>
-                  <a:srgbClr val="0EA5E9"/>
-                </a:solidFill>
-              </a:defRPr>
-            </a:pPr>
-            <a:r>
-              <a:t>Member 7: Production DevOps &amp; Container Serving</a:t>
-            </a:r>
-          </a:p>
-        </p:txBody>
-      </p:sp>
-      <p:sp>
-        <p:nvSpPr>
-          <p:cNvPr id="25" name="TextBox 24"/>
-          <p:cNvSpPr txBox="1"/>
-          <p:nvPr/>
-        </p:nvSpPr>
-        <p:spPr>
-          <a:xfrm>
-            <a:off x="868680" y="5577840"/>
-            <a:ext cx="4846320" cy="685800"/>
-          </a:xfrm>
-          <a:prstGeom prst="rect">
-            <a:avLst/>
-          </a:prstGeom>
-          <a:noFill/>
-        </p:spPr>
-        <p:txBody>
-          <a:bodyPr wrap="square">
-            <a:spAutoFit/>
-          </a:bodyPr>
-          <a:lstStyle/>
-          <a:p>
-            <a:pPr>
-              <a:defRPr sz="1050">
-                <a:solidFill>
-                  <a:srgbClr val="F8FAFC"/>
-                </a:solidFill>
-              </a:defRPr>
-            </a:pPr>
-            <a:r>
-              <a:t>FastAPI architecture, Lite serving mode (&lt;2MB), Docker multi-stage builds, and CI/CD automation.</a:t>
+              <a:defRPr sz="1150">
+                <a:solidFill>
+                  <a:srgbClr val="F8FAFC"/>
+                </a:solidFill>
+              </a:defRPr>
+            </a:pPr>
+            <a:r>
+              <a:t>• Unified Live Scoring Code Path:</a:t>
+            </a:r>
+          </a:p>
+          <a:p>
+            <a:pPr>
+              <a:defRPr sz="1150">
+                <a:solidFill>
+                  <a:srgbClr val="F8FAFC"/>
+                </a:solidFill>
+              </a:defRPr>
+            </a:pPr>
+            <a:r>
+              <a:t>  Every discharge—whether from REST webhook, CSV bulk drop, or simulated replay—passes through the frozen pipeline.</a:t>
+            </a:r>
+          </a:p>
+          <a:p>
+            <a:pPr>
+              <a:defRPr sz="1150">
+                <a:solidFill>
+                  <a:srgbClr val="F8FAFC"/>
+                </a:solidFill>
+              </a:defRPr>
+            </a:pPr>
+          </a:p>
+          <a:p>
+            <a:pPr>
+              <a:defRPr sz="1150">
+                <a:solidFill>
+                  <a:srgbClr val="F8FAFC"/>
+                </a:solidFill>
+              </a:defRPr>
+            </a:pPr>
+            <a:r>
+              <a:t>• Permanent Simulated Disclosure:</a:t>
+            </a:r>
+          </a:p>
+          <a:p>
+            <a:pPr>
+              <a:defRPr sz="1150">
+                <a:solidFill>
+                  <a:srgbClr val="F8FAFC"/>
+                </a:solidFill>
+              </a:defRPr>
+            </a:pPr>
+            <a:r>
+              <a:t>  All simulated replayed encounters are permanently watermarked in UI and API with outcomes sealed in ground-truth storage.</a:t>
+            </a:r>
+          </a:p>
+          <a:p>
+            <a:pPr>
+              <a:defRPr sz="1150">
+                <a:solidFill>
+                  <a:srgbClr val="F8FAFC"/>
+                </a:solidFill>
+              </a:defRPr>
+            </a:pPr>
+          </a:p>
+          <a:p>
+            <a:pPr>
+              <a:defRPr sz="1150">
+                <a:solidFill>
+                  <a:srgbClr val="F8FAFC"/>
+                </a:solidFill>
+              </a:defRPr>
+            </a:pPr>
+            <a:r>
+              <a:t>• Time Machine Prospective Verification:</a:t>
+            </a:r>
+          </a:p>
+          <a:p>
+            <a:pPr>
+              <a:defRPr sz="1150">
+                <a:solidFill>
+                  <a:srgbClr val="F8FAFC"/>
+                </a:solidFill>
+              </a:defRPr>
+            </a:pPr>
+            <a:r>
+              <a:t>  Clinicians advance simulated time (+7d, +30d) to release real held-out outcomes, instantly updating empirical ROC-AUC with Wilson intervals.</a:t>
+            </a:r>
+          </a:p>
+          <a:p>
+            <a:pPr>
+              <a:defRPr sz="1150">
+                <a:solidFill>
+                  <a:srgbClr val="F8FAFC"/>
+                </a:solidFill>
+              </a:defRPr>
+            </a:pPr>
+          </a:p>
+          <a:p>
+            <a:pPr>
+              <a:defRPr sz="1150">
+                <a:solidFill>
+                  <a:srgbClr val="F8FAFC"/>
+                </a:solidFill>
+              </a:defRPr>
+            </a:pPr>
+            <a:r>
+              <a:t>• Cardiac Rhythm Status Indicator:</a:t>
+            </a:r>
+          </a:p>
+          <a:p>
+            <a:pPr>
+              <a:defRPr sz="1150">
+                <a:solidFill>
+                  <a:srgbClr val="F8FAFC"/>
+                </a:solidFill>
+              </a:defRPr>
+            </a:pPr>
+            <a:r>
+              <a:t>  Animated SVG ECG heartbeat indicator pulses in header and flatlines gracefully if backend connectivity is interrupted.</a:t>
             </a:r>
           </a:p>
         </p:txBody>
@@ -7234,7 +7234,2638 @@
               </a:defRPr>
             </a:pPr>
             <a:r>
-              <a:t>13. PRODUCTION ROADMAP &amp; NEXT STEPS</a:t>
+              <a:t>11. ARCHITECTURE ALTERNATIVES &amp; PRIVACY</a:t>
+            </a:r>
+          </a:p>
+        </p:txBody>
+      </p:sp>
+      <p:sp>
+        <p:nvSpPr>
+          <p:cNvPr id="4" name="TextBox 3"/>
+          <p:cNvSpPr txBox="1"/>
+          <p:nvPr/>
+        </p:nvSpPr>
+        <p:spPr>
+          <a:xfrm>
+            <a:off x="731520" y="640080"/>
+            <a:ext cx="10515600" cy="640080"/>
+          </a:xfrm>
+          <a:prstGeom prst="rect">
+            <a:avLst/>
+          </a:prstGeom>
+          <a:noFill/>
+        </p:spPr>
+        <p:txBody>
+          <a:bodyPr wrap="square">
+            <a:spAutoFit/>
+          </a:bodyPr>
+          <a:lstStyle/>
+          <a:p>
+            <a:pPr>
+              <a:defRPr sz="2200" b="1">
+                <a:solidFill>
+                  <a:srgbClr val="F8FAFC"/>
+                </a:solidFill>
+              </a:defRPr>
+            </a:pPr>
+            <a:r>
+              <a:t>Enterprise Integration Architecture Alternatives &amp; Zero-PHI Security</a:t>
+            </a:r>
+          </a:p>
+        </p:txBody>
+      </p:sp>
+      <p:sp>
+        <p:nvSpPr>
+          <p:cNvPr id="5" name="Rounded Rectangle 4"/>
+          <p:cNvSpPr/>
+          <p:nvPr/>
+        </p:nvSpPr>
+        <p:spPr>
+          <a:xfrm>
+            <a:off x="731520" y="1463040"/>
+            <a:ext cx="5120640" cy="4754880"/>
+          </a:xfrm>
+          <a:prstGeom prst="roundRect">
+            <a:avLst/>
+          </a:prstGeom>
+          <a:solidFill>
+            <a:srgbClr val="1E293B"/>
+          </a:solidFill>
+          <a:ln w="19050">
+            <a:solidFill>
+              <a:srgbClr val="334155"/>
+            </a:solidFill>
+          </a:ln>
+        </p:spPr>
+        <p:style>
+          <a:lnRef idx="1">
+            <a:schemeClr val="accent1"/>
+          </a:lnRef>
+          <a:fillRef idx="3">
+            <a:schemeClr val="accent1"/>
+          </a:fillRef>
+          <a:effectRef idx="2">
+            <a:schemeClr val="accent1"/>
+          </a:effectRef>
+          <a:fontRef idx="minor">
+            <a:schemeClr val="lt1"/>
+          </a:fontRef>
+        </p:style>
+        <p:txBody>
+          <a:bodyPr rtlCol="0" anchor="ctr"/>
+          <a:lstStyle/>
+          <a:p>
+            <a:pPr algn="ctr"/>
+          </a:p>
+        </p:txBody>
+      </p:sp>
+      <p:sp>
+        <p:nvSpPr>
+          <p:cNvPr id="6" name="TextBox 5"/>
+          <p:cNvSpPr txBox="1"/>
+          <p:nvPr/>
+        </p:nvSpPr>
+        <p:spPr>
+          <a:xfrm>
+            <a:off x="914400" y="1600200"/>
+            <a:ext cx="4754879" cy="365760"/>
+          </a:xfrm>
+          <a:prstGeom prst="rect">
+            <a:avLst/>
+          </a:prstGeom>
+          <a:noFill/>
+        </p:spPr>
+        <p:txBody>
+          <a:bodyPr wrap="none">
+            <a:spAutoFit/>
+          </a:bodyPr>
+          <a:lstStyle/>
+          <a:p>
+            <a:pPr>
+              <a:defRPr sz="1300" b="1">
+                <a:solidFill>
+                  <a:srgbClr val="0EA5E9"/>
+                </a:solidFill>
+              </a:defRPr>
+            </a:pPr>
+            <a:r>
+              <a:t>Multi-Pattern Ingestion Architecture</a:t>
+            </a:r>
+          </a:p>
+        </p:txBody>
+      </p:sp>
+      <p:sp>
+        <p:nvSpPr>
+          <p:cNvPr id="7" name="TextBox 6"/>
+          <p:cNvSpPr txBox="1"/>
+          <p:nvPr/>
+        </p:nvSpPr>
+        <p:spPr>
+          <a:xfrm>
+            <a:off x="914400" y="4663440"/>
+            <a:ext cx="4754880" cy="1371600"/>
+          </a:xfrm>
+          <a:prstGeom prst="rect">
+            <a:avLst/>
+          </a:prstGeom>
+          <a:noFill/>
+        </p:spPr>
+        <p:txBody>
+          <a:bodyPr wrap="square">
+            <a:spAutoFit/>
+          </a:bodyPr>
+          <a:lstStyle/>
+          <a:p>
+            <a:pPr>
+              <a:defRPr sz="1050">
+                <a:solidFill>
+                  <a:srgbClr val="F8FAFC"/>
+                </a:solidFill>
+              </a:defRPr>
+            </a:pPr>
+            <a:r>
+              <a:t>• Pattern 1 (Implemented): REST Webhook Push (&lt;10ms inference, JSON schema).</a:t>
+            </a:r>
+          </a:p>
+          <a:p>
+            <a:pPr>
+              <a:defRPr sz="1050">
+                <a:solidFill>
+                  <a:srgbClr val="F8FAFC"/>
+                </a:solidFill>
+              </a:defRPr>
+            </a:pPr>
+            <a:r>
+              <a:t>• Pattern 2 (Implemented): CSV Batch Drop with row-level validation &amp; error report.</a:t>
+            </a:r>
+          </a:p>
+          <a:p>
+            <a:pPr>
+              <a:defRPr sz="1050">
+                <a:solidFill>
+                  <a:srgbClr val="F8FAFC"/>
+                </a:solidFill>
+              </a:defRPr>
+            </a:pPr>
+            <a:r>
+              <a:t>• Pattern 3 (Forward Design): HL7 FHIR R4 Encounter &amp; Condition listener.</a:t>
+            </a:r>
+          </a:p>
+          <a:p>
+            <a:pPr>
+              <a:defRPr sz="1050">
+                <a:solidFill>
+                  <a:srgbClr val="F8FAFC"/>
+                </a:solidFill>
+              </a:defRPr>
+            </a:pPr>
+            <a:r>
+              <a:t>• Zero-PHI Boundary: Operates strictly on de-identified clinical feature vectors.</a:t>
+            </a:r>
+          </a:p>
+        </p:txBody>
+      </p:sp>
+      <p:sp>
+        <p:nvSpPr>
+          <p:cNvPr id="8" name="Rounded Rectangle 7"/>
+          <p:cNvSpPr/>
+          <p:nvPr/>
+        </p:nvSpPr>
+        <p:spPr>
+          <a:xfrm>
+            <a:off x="6126480" y="1463040"/>
+            <a:ext cx="5303520" cy="4754880"/>
+          </a:xfrm>
+          <a:prstGeom prst="roundRect">
+            <a:avLst/>
+          </a:prstGeom>
+          <a:solidFill>
+            <a:srgbClr val="1E293B"/>
+          </a:solidFill>
+          <a:ln w="19050">
+            <a:solidFill>
+              <a:srgbClr val="334155"/>
+            </a:solidFill>
+          </a:ln>
+        </p:spPr>
+        <p:style>
+          <a:lnRef idx="1">
+            <a:schemeClr val="accent1"/>
+          </a:lnRef>
+          <a:fillRef idx="3">
+            <a:schemeClr val="accent1"/>
+          </a:fillRef>
+          <a:effectRef idx="2">
+            <a:schemeClr val="accent1"/>
+          </a:effectRef>
+          <a:fontRef idx="minor">
+            <a:schemeClr val="lt1"/>
+          </a:fontRef>
+        </p:style>
+        <p:txBody>
+          <a:bodyPr rtlCol="0" anchor="ctr"/>
+          <a:lstStyle/>
+          <a:p>
+            <a:pPr algn="ctr"/>
+          </a:p>
+        </p:txBody>
+      </p:sp>
+      <p:sp>
+        <p:nvSpPr>
+          <p:cNvPr id="9" name="TextBox 8"/>
+          <p:cNvSpPr txBox="1"/>
+          <p:nvPr/>
+        </p:nvSpPr>
+        <p:spPr>
+          <a:xfrm>
+            <a:off x="6309360" y="1600200"/>
+            <a:ext cx="4937759" cy="365760"/>
+          </a:xfrm>
+          <a:prstGeom prst="rect">
+            <a:avLst/>
+          </a:prstGeom>
+          <a:noFill/>
+        </p:spPr>
+        <p:txBody>
+          <a:bodyPr wrap="none">
+            <a:spAutoFit/>
+          </a:bodyPr>
+          <a:lstStyle/>
+          <a:p>
+            <a:pPr>
+              <a:defRPr sz="1300" b="1">
+                <a:solidFill>
+                  <a:srgbClr val="0EA5E9"/>
+                </a:solidFill>
+              </a:defRPr>
+            </a:pPr>
+            <a:r>
+              <a:t>Deployment Topologies &amp; Enterprise Governance</a:t>
+            </a:r>
+          </a:p>
+        </p:txBody>
+      </p:sp>
+      <p:sp>
+        <p:nvSpPr>
+          <p:cNvPr id="10" name="TextBox 9"/>
+          <p:cNvSpPr txBox="1"/>
+          <p:nvPr/>
+        </p:nvSpPr>
+        <p:spPr>
+          <a:xfrm>
+            <a:off x="6309360" y="2011680"/>
+            <a:ext cx="4937760" cy="4023360"/>
+          </a:xfrm>
+          <a:prstGeom prst="rect">
+            <a:avLst/>
+          </a:prstGeom>
+          <a:noFill/>
+        </p:spPr>
+        <p:txBody>
+          <a:bodyPr wrap="square">
+            <a:spAutoFit/>
+          </a:bodyPr>
+          <a:lstStyle/>
+          <a:p>
+            <a:pPr>
+              <a:defRPr sz="1150">
+                <a:solidFill>
+                  <a:srgbClr val="F8FAFC"/>
+                </a:solidFill>
+              </a:defRPr>
+            </a:pPr>
+            <a:r>
+              <a:t>• Flexible Deployment Topologies:</a:t>
+            </a:r>
+          </a:p>
+          <a:p>
+            <a:pPr>
+              <a:defRPr sz="1150">
+                <a:solidFill>
+                  <a:srgbClr val="F8FAFC"/>
+                </a:solidFill>
+              </a:defRPr>
+            </a:pPr>
+            <a:r>
+              <a:t>  - Edge In-EHR: Co-located with Epic/Cerner on hospital premise (&lt;10ms LAN latency).</a:t>
+            </a:r>
+          </a:p>
+          <a:p>
+            <a:pPr>
+              <a:defRPr sz="1150">
+                <a:solidFill>
+                  <a:srgbClr val="F8FAFC"/>
+                </a:solidFill>
+              </a:defRPr>
+            </a:pPr>
+            <a:r>
+              <a:t>  - Dedicated Private Cloud: Single-tenant VPC with KMS encryption.</a:t>
+            </a:r>
+          </a:p>
+          <a:p>
+            <a:pPr>
+              <a:defRPr sz="1150">
+                <a:solidFill>
+                  <a:srgbClr val="F8FAFC"/>
+                </a:solidFill>
+              </a:defRPr>
+            </a:pPr>
+            <a:r>
+              <a:t>  - Hybrid Microservice: Stateless container with zero external data egress.</a:t>
+            </a:r>
+          </a:p>
+          <a:p>
+            <a:pPr>
+              <a:defRPr sz="1150">
+                <a:solidFill>
+                  <a:srgbClr val="F8FAFC"/>
+                </a:solidFill>
+              </a:defRPr>
+            </a:pPr>
+          </a:p>
+          <a:p>
+            <a:pPr>
+              <a:defRPr sz="1150">
+                <a:solidFill>
+                  <a:srgbClr val="F8FAFC"/>
+                </a:solidFill>
+              </a:defRPr>
+            </a:pPr>
+            <a:r>
+              <a:t>• Enterprise Security &amp; Access Control:</a:t>
+            </a:r>
+          </a:p>
+          <a:p>
+            <a:pPr>
+              <a:defRPr sz="1150">
+                <a:solidFill>
+                  <a:srgbClr val="F8FAFC"/>
+                </a:solidFill>
+              </a:defRPr>
+            </a:pPr>
+            <a:r>
+              <a:t>  - OIDC / SAML 2.0 Single Sign-On integration ready.</a:t>
+            </a:r>
+          </a:p>
+          <a:p>
+            <a:pPr>
+              <a:defRPr sz="1150">
+                <a:solidFill>
+                  <a:srgbClr val="F8FAFC"/>
+                </a:solidFill>
+              </a:defRPr>
+            </a:pPr>
+            <a:r>
+              <a:t>  - Role-Based Access Control (RBAC): Care Coordinator, Triage Lead, Chief Medical Officer.</a:t>
+            </a:r>
+          </a:p>
+          <a:p>
+            <a:pPr>
+              <a:defRPr sz="1150">
+                <a:solidFill>
+                  <a:srgbClr val="F8FAFC"/>
+                </a:solidFill>
+              </a:defRPr>
+            </a:pPr>
+            <a:r>
+              <a:t>  - Complete append-only audit trail logging all status mutations and clinician tier overrides.</a:t>
+            </a:r>
+          </a:p>
+          <a:p>
+            <a:pPr>
+              <a:defRPr sz="1150">
+                <a:solidFill>
+                  <a:srgbClr val="F8FAFC"/>
+                </a:solidFill>
+              </a:defRPr>
+            </a:pPr>
+          </a:p>
+          <a:p>
+            <a:pPr>
+              <a:defRPr sz="1150">
+                <a:solidFill>
+                  <a:srgbClr val="F8FAFC"/>
+                </a:solidFill>
+              </a:defRPr>
+            </a:pPr>
+            <a:r>
+              <a:t>• Lightweight Operational Footprint:</a:t>
+            </a:r>
+          </a:p>
+          <a:p>
+            <a:pPr>
+              <a:defRPr sz="1150">
+                <a:solidFill>
+                  <a:srgbClr val="F8FAFC"/>
+                </a:solidFill>
+              </a:defRPr>
+            </a:pPr>
+            <a:r>
+              <a:t>  - Lite serving mode operates in 435.2MB RAM (90.9% reduction).</a:t>
+            </a:r>
+          </a:p>
+        </p:txBody>
+      </p:sp>
+    </p:spTree>
+  </p:cSld>
+  <p:clrMapOvr>
+    <a:masterClrMapping/>
+  </p:clrMapOvr>
+</p:sld>
+</file>
+
+<file path=ppt/slides/slide15.xml><?xml version="1.0" encoding="utf-8"?>
+<p:sld xmlns:a="http://schemas.openxmlformats.org/drawingml/2006/main" xmlns:p="http://schemas.openxmlformats.org/presentationml/2006/main" xmlns:r="http://schemas.openxmlformats.org/officeDocument/2006/relationships">
+  <p:cSld>
+    <p:spTree>
+      <p:nvGrpSpPr>
+        <p:cNvPr id="1" name=""/>
+        <p:cNvGrpSpPr/>
+        <p:nvPr/>
+      </p:nvGrpSpPr>
+      <p:grpSpPr/>
+      <p:sp>
+        <p:nvSpPr>
+          <p:cNvPr id="2" name="Rectangle 1"/>
+          <p:cNvSpPr/>
+          <p:nvPr/>
+        </p:nvSpPr>
+        <p:spPr>
+          <a:xfrm>
+            <a:off x="0" y="0"/>
+            <a:ext cx="12191695" cy="6858000"/>
+          </a:xfrm>
+          <a:prstGeom prst="rect">
+            <a:avLst/>
+          </a:prstGeom>
+          <a:solidFill>
+            <a:srgbClr val="0F172A"/>
+          </a:solidFill>
+          <a:ln>
+            <a:noFill/>
+          </a:ln>
+        </p:spPr>
+        <p:style>
+          <a:lnRef idx="1">
+            <a:schemeClr val="accent1"/>
+          </a:lnRef>
+          <a:fillRef idx="3">
+            <a:schemeClr val="accent1"/>
+          </a:fillRef>
+          <a:effectRef idx="2">
+            <a:schemeClr val="accent1"/>
+          </a:effectRef>
+          <a:fontRef idx="minor">
+            <a:schemeClr val="lt1"/>
+          </a:fontRef>
+        </p:style>
+        <p:txBody>
+          <a:bodyPr rtlCol="0" anchor="ctr"/>
+          <a:lstStyle/>
+          <a:p>
+            <a:pPr algn="ctr"/>
+          </a:p>
+        </p:txBody>
+      </p:sp>
+      <p:sp>
+        <p:nvSpPr>
+          <p:cNvPr id="3" name="TextBox 2"/>
+          <p:cNvSpPr txBox="1"/>
+          <p:nvPr/>
+        </p:nvSpPr>
+        <p:spPr>
+          <a:xfrm>
+            <a:off x="731520" y="365760"/>
+            <a:ext cx="10515600" cy="320040"/>
+          </a:xfrm>
+          <a:prstGeom prst="rect">
+            <a:avLst/>
+          </a:prstGeom>
+          <a:noFill/>
+        </p:spPr>
+        <p:txBody>
+          <a:bodyPr wrap="square">
+            <a:spAutoFit/>
+          </a:bodyPr>
+          <a:lstStyle/>
+          <a:p>
+            <a:pPr>
+              <a:defRPr sz="1000" b="1">
+                <a:solidFill>
+                  <a:srgbClr val="0EA5E9"/>
+                </a:solidFill>
+              </a:defRPr>
+            </a:pPr>
+            <a:r>
+              <a:t>12. PRODUCTION DEPLOYMENT &amp; BENCHMARKING</a:t>
+            </a:r>
+          </a:p>
+        </p:txBody>
+      </p:sp>
+      <p:sp>
+        <p:nvSpPr>
+          <p:cNvPr id="4" name="TextBox 3"/>
+          <p:cNvSpPr txBox="1"/>
+          <p:nvPr/>
+        </p:nvSpPr>
+        <p:spPr>
+          <a:xfrm>
+            <a:off x="731520" y="640080"/>
+            <a:ext cx="10515600" cy="640080"/>
+          </a:xfrm>
+          <a:prstGeom prst="rect">
+            <a:avLst/>
+          </a:prstGeom>
+          <a:noFill/>
+        </p:spPr>
+        <p:txBody>
+          <a:bodyPr wrap="square">
+            <a:spAutoFit/>
+          </a:bodyPr>
+          <a:lstStyle/>
+          <a:p>
+            <a:pPr>
+              <a:defRPr sz="2200" b="1">
+                <a:solidFill>
+                  <a:srgbClr val="F8FAFC"/>
+                </a:solidFill>
+              </a:defRPr>
+            </a:pPr>
+            <a:r>
+              <a:t>Enterprise Production Readiness, Latency &amp; Drift Telemetry</a:t>
+            </a:r>
+          </a:p>
+        </p:txBody>
+      </p:sp>
+      <p:sp>
+        <p:nvSpPr>
+          <p:cNvPr id="5" name="Rounded Rectangle 4"/>
+          <p:cNvSpPr/>
+          <p:nvPr/>
+        </p:nvSpPr>
+        <p:spPr>
+          <a:xfrm>
+            <a:off x="731520" y="1463040"/>
+            <a:ext cx="5120640" cy="4754880"/>
+          </a:xfrm>
+          <a:prstGeom prst="roundRect">
+            <a:avLst/>
+          </a:prstGeom>
+          <a:solidFill>
+            <a:srgbClr val="1E293B"/>
+          </a:solidFill>
+          <a:ln w="19050">
+            <a:solidFill>
+              <a:srgbClr val="334155"/>
+            </a:solidFill>
+          </a:ln>
+        </p:spPr>
+        <p:style>
+          <a:lnRef idx="1">
+            <a:schemeClr val="accent1"/>
+          </a:lnRef>
+          <a:fillRef idx="3">
+            <a:schemeClr val="accent1"/>
+          </a:fillRef>
+          <a:effectRef idx="2">
+            <a:schemeClr val="accent1"/>
+          </a:effectRef>
+          <a:fontRef idx="minor">
+            <a:schemeClr val="lt1"/>
+          </a:fontRef>
+        </p:style>
+        <p:txBody>
+          <a:bodyPr rtlCol="0" anchor="ctr"/>
+          <a:lstStyle/>
+          <a:p>
+            <a:pPr algn="ctr"/>
+          </a:p>
+        </p:txBody>
+      </p:sp>
+      <p:sp>
+        <p:nvSpPr>
+          <p:cNvPr id="6" name="TextBox 5"/>
+          <p:cNvSpPr txBox="1"/>
+          <p:nvPr/>
+        </p:nvSpPr>
+        <p:spPr>
+          <a:xfrm>
+            <a:off x="914400" y="1600200"/>
+            <a:ext cx="4754879" cy="365760"/>
+          </a:xfrm>
+          <a:prstGeom prst="rect">
+            <a:avLst/>
+          </a:prstGeom>
+          <a:noFill/>
+        </p:spPr>
+        <p:txBody>
+          <a:bodyPr wrap="none">
+            <a:spAutoFit/>
+          </a:bodyPr>
+          <a:lstStyle/>
+          <a:p>
+            <a:pPr>
+              <a:defRPr sz="1300" b="1">
+                <a:solidFill>
+                  <a:srgbClr val="0EA5E9"/>
+                </a:solidFill>
+              </a:defRPr>
+            </a:pPr>
+            <a:r>
+              <a:t>Production Engineering Specs</a:t>
+            </a:r>
+          </a:p>
+        </p:txBody>
+      </p:sp>
+      <p:sp>
+        <p:nvSpPr>
+          <p:cNvPr id="7" name="TextBox 6"/>
+          <p:cNvSpPr txBox="1"/>
+          <p:nvPr/>
+        </p:nvSpPr>
+        <p:spPr>
+          <a:xfrm>
+            <a:off x="914400" y="2011680"/>
+            <a:ext cx="4754880" cy="4023360"/>
+          </a:xfrm>
+          <a:prstGeom prst="rect">
+            <a:avLst/>
+          </a:prstGeom>
+          <a:noFill/>
+        </p:spPr>
+        <p:txBody>
+          <a:bodyPr wrap="square">
+            <a:spAutoFit/>
+          </a:bodyPr>
+          <a:lstStyle/>
+          <a:p>
+            <a:pPr>
+              <a:defRPr sz="1150">
+                <a:solidFill>
+                  <a:srgbClr val="F8FAFC"/>
+                </a:solidFill>
+              </a:defRPr>
+            </a:pPr>
+            <a:r>
+              <a:t>• FastAPI Backend with 7 Verified Endpoints:</a:t>
+            </a:r>
+          </a:p>
+          <a:p>
+            <a:pPr>
+              <a:defRPr sz="1150">
+                <a:solidFill>
+                  <a:srgbClr val="F8FAFC"/>
+                </a:solidFill>
+              </a:defRPr>
+            </a:pPr>
+            <a:r>
+              <a:t>  /health, /predict, /similar, /explain, /cohort, /metrics, /interventions.</a:t>
+            </a:r>
+          </a:p>
+          <a:p>
+            <a:pPr>
+              <a:defRPr sz="1150">
+                <a:solidFill>
+                  <a:srgbClr val="F8FAFC"/>
+                </a:solidFill>
+              </a:defRPr>
+            </a:pPr>
+          </a:p>
+          <a:p>
+            <a:pPr>
+              <a:defRPr sz="1150">
+                <a:solidFill>
+                  <a:srgbClr val="F8FAFC"/>
+                </a:solidFill>
+              </a:defRPr>
+            </a:pPr>
+            <a:r>
+              <a:t>• Measured Latency Profile (100 Requests):</a:t>
+            </a:r>
+          </a:p>
+          <a:p>
+            <a:pPr>
+              <a:defRPr sz="1150">
+                <a:solidFill>
+                  <a:srgbClr val="F8FAFC"/>
+                </a:solidFill>
+              </a:defRPr>
+            </a:pPr>
+            <a:r>
+              <a:t>  Mean: 257.9ms | Median: 243.6ms | p95: 386.0ms (&lt;500ms gate: PASS).</a:t>
+            </a:r>
+          </a:p>
+          <a:p>
+            <a:pPr>
+              <a:defRPr sz="1150">
+                <a:solidFill>
+                  <a:srgbClr val="F8FAFC"/>
+                </a:solidFill>
+              </a:defRPr>
+            </a:pPr>
+          </a:p>
+          <a:p>
+            <a:pPr>
+              <a:defRPr sz="1150">
+                <a:solidFill>
+                  <a:srgbClr val="F8FAFC"/>
+                </a:solidFill>
+              </a:defRPr>
+            </a:pPr>
+            <a:r>
+              <a:t>• Dual Serving Footprints:</a:t>
+            </a:r>
+          </a:p>
+          <a:p>
+            <a:pPr>
+              <a:defRPr sz="1150">
+                <a:solidFill>
+                  <a:srgbClr val="F8FAFC"/>
+                </a:solidFill>
+              </a:defRPr>
+            </a:pPr>
+            <a:r>
+              <a:t>  - Full Mode: 18.5MB disk, 466.3MB RAM.</a:t>
+            </a:r>
+          </a:p>
+          <a:p>
+            <a:pPr>
+              <a:defRPr sz="1150">
+                <a:solidFill>
+                  <a:srgbClr val="F8FAFC"/>
+                </a:solidFill>
+              </a:defRPr>
+            </a:pPr>
+            <a:r>
+              <a:t>  - Lite Mode: 1.69MB disk (90.9% reduction), 435.2MB RAM.</a:t>
+            </a:r>
+          </a:p>
+          <a:p>
+            <a:pPr>
+              <a:defRPr sz="1150">
+                <a:solidFill>
+                  <a:srgbClr val="F8FAFC"/>
+                </a:solidFill>
+              </a:defRPr>
+            </a:pPr>
+            <a:r>
+              <a:t>  - Fits comfortably within 512MB free tier containers.</a:t>
+            </a:r>
+          </a:p>
+          <a:p>
+            <a:pPr>
+              <a:defRPr sz="1150">
+                <a:solidFill>
+                  <a:srgbClr val="F8FAFC"/>
+                </a:solidFill>
+              </a:defRPr>
+            </a:pPr>
+          </a:p>
+          <a:p>
+            <a:pPr>
+              <a:defRPr sz="1150">
+                <a:solidFill>
+                  <a:srgbClr val="F8FAFC"/>
+                </a:solidFill>
+              </a:defRPr>
+            </a:pPr>
+            <a:r>
+              <a:t>• 100% CI Quality Gates:</a:t>
+            </a:r>
+          </a:p>
+          <a:p>
+            <a:pPr>
+              <a:defRPr sz="1150">
+                <a:solidFill>
+                  <a:srgbClr val="F8FAFC"/>
+                </a:solidFill>
+              </a:defRPr>
+            </a:pPr>
+            <a:r>
+              <a:t>  34/34 Pytest unit tests passing; 11/11 Playwright E2E smoke tests passing; ESLint &amp; Black clean.</a:t>
+            </a:r>
+          </a:p>
+        </p:txBody>
+      </p:sp>
+      <p:sp>
+        <p:nvSpPr>
+          <p:cNvPr id="8" name="Rounded Rectangle 7"/>
+          <p:cNvSpPr/>
+          <p:nvPr/>
+        </p:nvSpPr>
+        <p:spPr>
+          <a:xfrm>
+            <a:off x="6126480" y="1463040"/>
+            <a:ext cx="5303520" cy="4754880"/>
+          </a:xfrm>
+          <a:prstGeom prst="roundRect">
+            <a:avLst/>
+          </a:prstGeom>
+          <a:solidFill>
+            <a:srgbClr val="1E293B"/>
+          </a:solidFill>
+          <a:ln w="19050">
+            <a:solidFill>
+              <a:srgbClr val="334155"/>
+            </a:solidFill>
+          </a:ln>
+        </p:spPr>
+        <p:style>
+          <a:lnRef idx="1">
+            <a:schemeClr val="accent1"/>
+          </a:lnRef>
+          <a:fillRef idx="3">
+            <a:schemeClr val="accent1"/>
+          </a:fillRef>
+          <a:effectRef idx="2">
+            <a:schemeClr val="accent1"/>
+          </a:effectRef>
+          <a:fontRef idx="minor">
+            <a:schemeClr val="lt1"/>
+          </a:fontRef>
+        </p:style>
+        <p:txBody>
+          <a:bodyPr rtlCol="0" anchor="ctr"/>
+          <a:lstStyle/>
+          <a:p>
+            <a:pPr algn="ctr"/>
+          </a:p>
+        </p:txBody>
+      </p:sp>
+      <p:sp>
+        <p:nvSpPr>
+          <p:cNvPr id="9" name="TextBox 8"/>
+          <p:cNvSpPr txBox="1"/>
+          <p:nvPr/>
+        </p:nvSpPr>
+        <p:spPr>
+          <a:xfrm>
+            <a:off x="6309360" y="1600200"/>
+            <a:ext cx="4937759" cy="365760"/>
+          </a:xfrm>
+          <a:prstGeom prst="rect">
+            <a:avLst/>
+          </a:prstGeom>
+          <a:noFill/>
+        </p:spPr>
+        <p:txBody>
+          <a:bodyPr wrap="none">
+            <a:spAutoFit/>
+          </a:bodyPr>
+          <a:lstStyle/>
+          <a:p>
+            <a:pPr>
+              <a:defRPr sz="1300" b="1">
+                <a:solidFill>
+                  <a:srgbClr val="0EA5E9"/>
+                </a:solidFill>
+              </a:defRPr>
+            </a:pPr>
+            <a:r>
+              <a:t>Real-Time Population Drift Telemetry (PSI)</a:t>
+            </a:r>
+          </a:p>
+        </p:txBody>
+      </p:sp>
+      <p:sp>
+        <p:nvSpPr>
+          <p:cNvPr id="10" name="TextBox 9"/>
+          <p:cNvSpPr txBox="1"/>
+          <p:nvPr/>
+        </p:nvSpPr>
+        <p:spPr>
+          <a:xfrm>
+            <a:off x="6309360" y="2011680"/>
+            <a:ext cx="4937760" cy="4023360"/>
+          </a:xfrm>
+          <a:prstGeom prst="rect">
+            <a:avLst/>
+          </a:prstGeom>
+          <a:noFill/>
+        </p:spPr>
+        <p:txBody>
+          <a:bodyPr wrap="none">
+            <a:spAutoFit/>
+          </a:bodyPr>
+          <a:lstStyle/>
+          <a:p>
+            <a:pPr>
+              <a:defRPr sz="1150">
+                <a:solidFill>
+                  <a:srgbClr val="F8FAFC"/>
+                </a:solidFill>
+              </a:defRPr>
+            </a:pPr>
+            <a:r>
+              <a:t>• Continuous Population Stability Index (PSI) Monitoring:</a:t>
+            </a:r>
+          </a:p>
+          <a:p>
+            <a:pPr>
+              <a:defRPr sz="1150">
+                <a:solidFill>
+                  <a:srgbClr val="F8FAFC"/>
+                </a:solidFill>
+              </a:defRPr>
+            </a:pPr>
+            <a:r>
+              <a:t>  - Monitored across all 42 tabular features comparing live test inference against train baseline.</a:t>
+            </a:r>
+          </a:p>
+          <a:p>
+            <a:pPr>
+              <a:defRPr sz="1150">
+                <a:solidFill>
+                  <a:srgbClr val="F8FAFC"/>
+                </a:solidFill>
+              </a:defRPr>
+            </a:pPr>
+            <a:r>
+              <a:t>  - Max Feature PSI Observed: 0.0049 (Threshold: 0.10 stable).</a:t>
+            </a:r>
+          </a:p>
+          <a:p>
+            <a:pPr>
+              <a:defRPr sz="1150">
+                <a:solidFill>
+                  <a:srgbClr val="F8FAFC"/>
+                </a:solidFill>
+              </a:defRPr>
+            </a:pPr>
+            <a:r>
+              <a:t>  - Features with High Drift (&gt;0.25): 0 features.</a:t>
+            </a:r>
+          </a:p>
+          <a:p>
+            <a:pPr>
+              <a:defRPr sz="1150">
+                <a:solidFill>
+                  <a:srgbClr val="F8FAFC"/>
+                </a:solidFill>
+              </a:defRPr>
+            </a:pPr>
+            <a:r>
+              <a:t>  - Score Output PSI: 0.0000 (Zero drift).</a:t>
+            </a:r>
+          </a:p>
+          <a:p>
+            <a:pPr>
+              <a:defRPr sz="1150">
+                <a:solidFill>
+                  <a:srgbClr val="F8FAFC"/>
+                </a:solidFill>
+              </a:defRPr>
+            </a:pPr>
+          </a:p>
+          <a:p>
+            <a:pPr>
+              <a:defRPr sz="1150">
+                <a:solidFill>
+                  <a:srgbClr val="F8FAFC"/>
+                </a:solidFill>
+              </a:defRPr>
+            </a:pPr>
+            <a:r>
+              <a:t>• Deterministic Care Transitions (api/interventions.py):</a:t>
+            </a:r>
+          </a:p>
+          <a:p>
+            <a:pPr>
+              <a:defRPr sz="1150">
+                <a:solidFill>
+                  <a:srgbClr val="F8FAFC"/>
+                </a:solidFill>
+              </a:defRPr>
+            </a:pPr>
+            <a:r>
+              <a:t>  - Maps positive SHAP drivers to protocolized actions (pharmacist med review, 48h nurse call, home health).</a:t>
+            </a:r>
+          </a:p>
+          <a:p>
+            <a:pPr>
+              <a:defRPr sz="1150">
+                <a:solidFill>
+                  <a:srgbClr val="F8FAFC"/>
+                </a:solidFill>
+              </a:defRPr>
+            </a:pPr>
+            <a:r>
+              <a:t>  - Zero generative hallucination; regulation-ready governance.</a:t>
+            </a:r>
+          </a:p>
+        </p:txBody>
+      </p:sp>
+    </p:spTree>
+  </p:cSld>
+  <p:clrMapOvr>
+    <a:masterClrMapping/>
+  </p:clrMapOvr>
+</p:sld>
+</file>
+
+<file path=ppt/slides/slide16.xml><?xml version="1.0" encoding="utf-8"?>
+<p:sld xmlns:a="http://schemas.openxmlformats.org/drawingml/2006/main" xmlns:p="http://schemas.openxmlformats.org/presentationml/2006/main" xmlns:r="http://schemas.openxmlformats.org/officeDocument/2006/relationships">
+  <p:cSld>
+    <p:spTree>
+      <p:nvGrpSpPr>
+        <p:cNvPr id="1" name=""/>
+        <p:cNvGrpSpPr/>
+        <p:nvPr/>
+      </p:nvGrpSpPr>
+      <p:grpSpPr/>
+      <p:sp>
+        <p:nvSpPr>
+          <p:cNvPr id="2" name="Rectangle 1"/>
+          <p:cNvSpPr/>
+          <p:nvPr/>
+        </p:nvSpPr>
+        <p:spPr>
+          <a:xfrm>
+            <a:off x="0" y="0"/>
+            <a:ext cx="12191695" cy="6858000"/>
+          </a:xfrm>
+          <a:prstGeom prst="rect">
+            <a:avLst/>
+          </a:prstGeom>
+          <a:solidFill>
+            <a:srgbClr val="0F172A"/>
+          </a:solidFill>
+          <a:ln>
+            <a:noFill/>
+          </a:ln>
+        </p:spPr>
+        <p:style>
+          <a:lnRef idx="1">
+            <a:schemeClr val="accent1"/>
+          </a:lnRef>
+          <a:fillRef idx="3">
+            <a:schemeClr val="accent1"/>
+          </a:fillRef>
+          <a:effectRef idx="2">
+            <a:schemeClr val="accent1"/>
+          </a:effectRef>
+          <a:fontRef idx="minor">
+            <a:schemeClr val="lt1"/>
+          </a:fontRef>
+        </p:style>
+        <p:txBody>
+          <a:bodyPr rtlCol="0" anchor="ctr"/>
+          <a:lstStyle/>
+          <a:p>
+            <a:pPr algn="ctr"/>
+          </a:p>
+        </p:txBody>
+      </p:sp>
+      <p:sp>
+        <p:nvSpPr>
+          <p:cNvPr id="3" name="TextBox 2"/>
+          <p:cNvSpPr txBox="1"/>
+          <p:nvPr/>
+        </p:nvSpPr>
+        <p:spPr>
+          <a:xfrm>
+            <a:off x="731520" y="365760"/>
+            <a:ext cx="10515600" cy="320040"/>
+          </a:xfrm>
+          <a:prstGeom prst="rect">
+            <a:avLst/>
+          </a:prstGeom>
+          <a:noFill/>
+        </p:spPr>
+        <p:txBody>
+          <a:bodyPr wrap="square">
+            <a:spAutoFit/>
+          </a:bodyPr>
+          <a:lstStyle/>
+          <a:p>
+            <a:pPr>
+              <a:defRPr sz="1000" b="1">
+                <a:solidFill>
+                  <a:srgbClr val="0EA5E9"/>
+                </a:solidFill>
+              </a:defRPr>
+            </a:pPr>
+            <a:r>
+              <a:t>13. LIMITATIONS &amp; ETHICAL GOVERNANCE</a:t>
+            </a:r>
+          </a:p>
+        </p:txBody>
+      </p:sp>
+      <p:sp>
+        <p:nvSpPr>
+          <p:cNvPr id="4" name="TextBox 3"/>
+          <p:cNvSpPr txBox="1"/>
+          <p:nvPr/>
+        </p:nvSpPr>
+        <p:spPr>
+          <a:xfrm>
+            <a:off x="731520" y="640080"/>
+            <a:ext cx="10515600" cy="640080"/>
+          </a:xfrm>
+          <a:prstGeom prst="rect">
+            <a:avLst/>
+          </a:prstGeom>
+          <a:noFill/>
+        </p:spPr>
+        <p:txBody>
+          <a:bodyPr wrap="square">
+            <a:spAutoFit/>
+          </a:bodyPr>
+          <a:lstStyle/>
+          <a:p>
+            <a:pPr>
+              <a:defRPr sz="2200" b="1">
+                <a:solidFill>
+                  <a:srgbClr val="F8FAFC"/>
+                </a:solidFill>
+              </a:defRPr>
+            </a:pPr>
+            <a:r>
+              <a:t>Clinical Limitations &amp; Responsible Governance</a:t>
+            </a:r>
+          </a:p>
+        </p:txBody>
+      </p:sp>
+      <p:sp>
+        <p:nvSpPr>
+          <p:cNvPr id="5" name="Rounded Rectangle 4"/>
+          <p:cNvSpPr/>
+          <p:nvPr/>
+        </p:nvSpPr>
+        <p:spPr>
+          <a:xfrm>
+            <a:off x="731520" y="1463040"/>
+            <a:ext cx="5120640" cy="4754880"/>
+          </a:xfrm>
+          <a:prstGeom prst="roundRect">
+            <a:avLst/>
+          </a:prstGeom>
+          <a:solidFill>
+            <a:srgbClr val="1E293B"/>
+          </a:solidFill>
+          <a:ln w="19050">
+            <a:solidFill>
+              <a:srgbClr val="334155"/>
+            </a:solidFill>
+          </a:ln>
+        </p:spPr>
+        <p:style>
+          <a:lnRef idx="1">
+            <a:schemeClr val="accent1"/>
+          </a:lnRef>
+          <a:fillRef idx="3">
+            <a:schemeClr val="accent1"/>
+          </a:fillRef>
+          <a:effectRef idx="2">
+            <a:schemeClr val="accent1"/>
+          </a:effectRef>
+          <a:fontRef idx="minor">
+            <a:schemeClr val="lt1"/>
+          </a:fontRef>
+        </p:style>
+        <p:txBody>
+          <a:bodyPr rtlCol="0" anchor="ctr"/>
+          <a:lstStyle/>
+          <a:p>
+            <a:pPr algn="ctr"/>
+          </a:p>
+        </p:txBody>
+      </p:sp>
+      <p:sp>
+        <p:nvSpPr>
+          <p:cNvPr id="6" name="TextBox 5"/>
+          <p:cNvSpPr txBox="1"/>
+          <p:nvPr/>
+        </p:nvSpPr>
+        <p:spPr>
+          <a:xfrm>
+            <a:off x="914400" y="1600200"/>
+            <a:ext cx="4754879" cy="365760"/>
+          </a:xfrm>
+          <a:prstGeom prst="rect">
+            <a:avLst/>
+          </a:prstGeom>
+          <a:noFill/>
+        </p:spPr>
+        <p:txBody>
+          <a:bodyPr wrap="none">
+            <a:spAutoFit/>
+          </a:bodyPr>
+          <a:lstStyle/>
+          <a:p>
+            <a:pPr>
+              <a:defRPr sz="1300" b="1">
+                <a:solidFill>
+                  <a:srgbClr val="0EA5E9"/>
+                </a:solidFill>
+              </a:defRPr>
+            </a:pPr>
+            <a:r>
+              <a:t>Known Empirical &amp; Data Limitations</a:t>
+            </a:r>
+          </a:p>
+        </p:txBody>
+      </p:sp>
+      <p:sp>
+        <p:nvSpPr>
+          <p:cNvPr id="7" name="TextBox 6"/>
+          <p:cNvSpPr txBox="1"/>
+          <p:nvPr/>
+        </p:nvSpPr>
+        <p:spPr>
+          <a:xfrm>
+            <a:off x="914400" y="2011680"/>
+            <a:ext cx="4754880" cy="4023360"/>
+          </a:xfrm>
+          <a:prstGeom prst="rect">
+            <a:avLst/>
+          </a:prstGeom>
+          <a:noFill/>
+        </p:spPr>
+        <p:txBody>
+          <a:bodyPr wrap="square">
+            <a:spAutoFit/>
+          </a:bodyPr>
+          <a:lstStyle/>
+          <a:p>
+            <a:pPr>
+              <a:defRPr sz="1150">
+                <a:solidFill>
+                  <a:srgbClr val="F8FAFC"/>
+                </a:solidFill>
+              </a:defRPr>
+            </a:pPr>
+            <a:r>
+              <a:t>1. Historical Era (1999–2008):</a:t>
+            </a:r>
+          </a:p>
+          <a:p>
+            <a:pPr>
+              <a:defRPr sz="1150">
+                <a:solidFill>
+                  <a:srgbClr val="F8FAFC"/>
+                </a:solidFill>
+              </a:defRPr>
+            </a:pPr>
+            <a:r>
+              <a:t>   Modern diabetes therapies (GLP-1 receptor agonists, SGLT-2 inhibitors) were not standard of care in this dataset.</a:t>
+            </a:r>
+          </a:p>
+          <a:p>
+            <a:pPr>
+              <a:defRPr sz="1150">
+                <a:solidFill>
+                  <a:srgbClr val="F8FAFC"/>
+                </a:solidFill>
+              </a:defRPr>
+            </a:pPr>
+          </a:p>
+          <a:p>
+            <a:pPr>
+              <a:defRPr sz="1150">
+                <a:solidFill>
+                  <a:srgbClr val="F8FAFC"/>
+                </a:solidFill>
+              </a:defRPr>
+            </a:pPr>
+            <a:r>
+              <a:t>2. Single-Network Censoring:</a:t>
+            </a:r>
+          </a:p>
+          <a:p>
+            <a:pPr>
+              <a:defRPr sz="1150">
+                <a:solidFill>
+                  <a:srgbClr val="F8FAFC"/>
+                </a:solidFill>
+              </a:defRPr>
+            </a:pPr>
+            <a:r>
+              <a:t>   Readmissions to outside hospital networks were unobserved. True population readmission rate is higher.</a:t>
+            </a:r>
+          </a:p>
+          <a:p>
+            <a:pPr>
+              <a:defRPr sz="1150">
+                <a:solidFill>
+                  <a:srgbClr val="F8FAFC"/>
+                </a:solidFill>
+              </a:defRPr>
+            </a:pPr>
+          </a:p>
+          <a:p>
+            <a:pPr>
+              <a:defRPr sz="1150">
+                <a:solidFill>
+                  <a:srgbClr val="F8FAFC"/>
+                </a:solidFill>
+              </a:defRPr>
+            </a:pPr>
+            <a:r>
+              <a:t>3. Coarse Laboratory Signal:</a:t>
+            </a:r>
+          </a:p>
+          <a:p>
+            <a:pPr>
+              <a:defRPr sz="1150">
+                <a:solidFill>
+                  <a:srgbClr val="F8FAFC"/>
+                </a:solidFill>
+              </a:defRPr>
+            </a:pPr>
+            <a:r>
+              <a:t>   A1C and glucose are categorical (&gt;8, Normal, None); vitals, BMI, and social determinants of health were not captured.</a:t>
+            </a:r>
+          </a:p>
+          <a:p>
+            <a:pPr>
+              <a:defRPr sz="1150">
+                <a:solidFill>
+                  <a:srgbClr val="F8FAFC"/>
+                </a:solidFill>
+              </a:defRPr>
+            </a:pPr>
+          </a:p>
+          <a:p>
+            <a:pPr>
+              <a:defRPr sz="1150">
+                <a:solidFill>
+                  <a:srgbClr val="F8FAFC"/>
+                </a:solidFill>
+              </a:defRPr>
+            </a:pPr>
+            <a:r>
+              <a:t>4. Bounded Discrimination:</a:t>
+            </a:r>
+          </a:p>
+          <a:p>
+            <a:pPr>
+              <a:defRPr sz="1150">
+                <a:solidFill>
+                  <a:srgbClr val="F8FAFC"/>
+                </a:solidFill>
+              </a:defRPr>
+            </a:pPr>
+            <a:r>
+              <a:t>   Test AUC is 0.6590. It is an operational prioritization tool, not a diagnostic oracle.</a:t>
+            </a:r>
+          </a:p>
+        </p:txBody>
+      </p:sp>
+      <p:sp>
+        <p:nvSpPr>
+          <p:cNvPr id="8" name="Rounded Rectangle 7"/>
+          <p:cNvSpPr/>
+          <p:nvPr/>
+        </p:nvSpPr>
+        <p:spPr>
+          <a:xfrm>
+            <a:off x="6126480" y="1463040"/>
+            <a:ext cx="5303520" cy="4754880"/>
+          </a:xfrm>
+          <a:prstGeom prst="roundRect">
+            <a:avLst/>
+          </a:prstGeom>
+          <a:solidFill>
+            <a:srgbClr val="1E293B"/>
+          </a:solidFill>
+          <a:ln w="19050">
+            <a:solidFill>
+              <a:srgbClr val="334155"/>
+            </a:solidFill>
+          </a:ln>
+        </p:spPr>
+        <p:style>
+          <a:lnRef idx="1">
+            <a:schemeClr val="accent1"/>
+          </a:lnRef>
+          <a:fillRef idx="3">
+            <a:schemeClr val="accent1"/>
+          </a:fillRef>
+          <a:effectRef idx="2">
+            <a:schemeClr val="accent1"/>
+          </a:effectRef>
+          <a:fontRef idx="minor">
+            <a:schemeClr val="lt1"/>
+          </a:fontRef>
+        </p:style>
+        <p:txBody>
+          <a:bodyPr rtlCol="0" anchor="ctr"/>
+          <a:lstStyle/>
+          <a:p>
+            <a:pPr algn="ctr"/>
+          </a:p>
+        </p:txBody>
+      </p:sp>
+      <p:sp>
+        <p:nvSpPr>
+          <p:cNvPr id="9" name="TextBox 8"/>
+          <p:cNvSpPr txBox="1"/>
+          <p:nvPr/>
+        </p:nvSpPr>
+        <p:spPr>
+          <a:xfrm>
+            <a:off x="6309360" y="1600200"/>
+            <a:ext cx="4937759" cy="365760"/>
+          </a:xfrm>
+          <a:prstGeom prst="rect">
+            <a:avLst/>
+          </a:prstGeom>
+          <a:noFill/>
+        </p:spPr>
+        <p:txBody>
+          <a:bodyPr wrap="none">
+            <a:spAutoFit/>
+          </a:bodyPr>
+          <a:lstStyle/>
+          <a:p>
+            <a:pPr>
+              <a:defRPr sz="1300" b="1">
+                <a:solidFill>
+                  <a:srgbClr val="0EA5E9"/>
+                </a:solidFill>
+              </a:defRPr>
+            </a:pPr>
+            <a:r>
+              <a:t>Responsible Deployment Principles</a:t>
+            </a:r>
+          </a:p>
+        </p:txBody>
+      </p:sp>
+      <p:sp>
+        <p:nvSpPr>
+          <p:cNvPr id="10" name="TextBox 9"/>
+          <p:cNvSpPr txBox="1"/>
+          <p:nvPr/>
+        </p:nvSpPr>
+        <p:spPr>
+          <a:xfrm>
+            <a:off x="6309360" y="2011680"/>
+            <a:ext cx="4937760" cy="4023360"/>
+          </a:xfrm>
+          <a:prstGeom prst="rect">
+            <a:avLst/>
+          </a:prstGeom>
+          <a:noFill/>
+        </p:spPr>
+        <p:txBody>
+          <a:bodyPr wrap="square">
+            <a:spAutoFit/>
+          </a:bodyPr>
+          <a:lstStyle/>
+          <a:p>
+            <a:pPr>
+              <a:defRPr sz="1150">
+                <a:solidFill>
+                  <a:srgbClr val="F8FAFC"/>
+                </a:solidFill>
+              </a:defRPr>
+            </a:pPr>
+            <a:r>
+              <a:t>• Human-in-the-Loop Safeguard:</a:t>
+            </a:r>
+          </a:p>
+          <a:p>
+            <a:pPr>
+              <a:defRPr sz="1150">
+                <a:solidFill>
+                  <a:srgbClr val="F8FAFC"/>
+                </a:solidFill>
+              </a:defRPr>
+            </a:pPr>
+            <a:r>
+              <a:t>  ReadmitIQ provides decision support, never automated order placement. All care transitions require clinician sign-off.</a:t>
+            </a:r>
+          </a:p>
+          <a:p>
+            <a:pPr>
+              <a:defRPr sz="1150">
+                <a:solidFill>
+                  <a:srgbClr val="F8FAFC"/>
+                </a:solidFill>
+              </a:defRPr>
+            </a:pPr>
+          </a:p>
+          <a:p>
+            <a:pPr>
+              <a:defRPr sz="1150">
+                <a:solidFill>
+                  <a:srgbClr val="F8FAFC"/>
+                </a:solidFill>
+              </a:defRPr>
+            </a:pPr>
+            <a:r>
+              <a:t>• Prominent Clinical Disclaimer:</a:t>
+            </a:r>
+          </a:p>
+          <a:p>
+            <a:pPr>
+              <a:defRPr sz="1150">
+                <a:solidFill>
+                  <a:srgbClr val="F8FAFC"/>
+                </a:solidFill>
+              </a:defRPr>
+            </a:pPr>
+            <a:r>
+              <a:t>  Displayed on every screen: 'Decision-support suggestions, not clinical advice. Clinical judgment supersedes algorithmic output.'</a:t>
+            </a:r>
+          </a:p>
+          <a:p>
+            <a:pPr>
+              <a:defRPr sz="1150">
+                <a:solidFill>
+                  <a:srgbClr val="F8FAFC"/>
+                </a:solidFill>
+              </a:defRPr>
+            </a:pPr>
+          </a:p>
+          <a:p>
+            <a:pPr>
+              <a:defRPr sz="1150">
+                <a:solidFill>
+                  <a:srgbClr val="F8FAFC"/>
+                </a:solidFill>
+              </a:defRPr>
+            </a:pPr>
+            <a:r>
+              <a:t>• Fairness Safeguard:</a:t>
+            </a:r>
+          </a:p>
+          <a:p>
+            <a:pPr>
+              <a:defRPr sz="1150">
+                <a:solidFill>
+                  <a:srgbClr val="F8FAFC"/>
+                </a:solidFill>
+              </a:defRPr>
+            </a:pPr>
+            <a:r>
+              <a:t>  Demographic-blinded model option ensures institutions can operate without demographic inputs.</a:t>
+            </a:r>
+          </a:p>
+          <a:p>
+            <a:pPr>
+              <a:defRPr sz="1150">
+                <a:solidFill>
+                  <a:srgbClr val="F8FAFC"/>
+                </a:solidFill>
+              </a:defRPr>
+            </a:pPr>
+          </a:p>
+          <a:p>
+            <a:pPr>
+              <a:defRPr sz="1150">
+                <a:solidFill>
+                  <a:srgbClr val="F8FAFC"/>
+                </a:solidFill>
+              </a:defRPr>
+            </a:pPr>
+            <a:r>
+              <a:t>• Fail-Safe Degradation:</a:t>
+            </a:r>
+          </a:p>
+          <a:p>
+            <a:pPr>
+              <a:defRPr sz="1150">
+                <a:solidFill>
+                  <a:srgbClr val="F8FAFC"/>
+                </a:solidFill>
+              </a:defRPr>
+            </a:pPr>
+            <a:r>
+              <a:t>  If the retriever fails or latency exceeds 1s, system gracefully falls back to base calibrated LightGBM scoring.</a:t>
+            </a:r>
+          </a:p>
+        </p:txBody>
+      </p:sp>
+    </p:spTree>
+  </p:cSld>
+  <p:clrMapOvr>
+    <a:masterClrMapping/>
+  </p:clrMapOvr>
+</p:sld>
+</file>
+
+<file path=ppt/slides/slide17.xml><?xml version="1.0" encoding="utf-8"?>
+<p:sld xmlns:a="http://schemas.openxmlformats.org/drawingml/2006/main" xmlns:p="http://schemas.openxmlformats.org/presentationml/2006/main" xmlns:r="http://schemas.openxmlformats.org/officeDocument/2006/relationships">
+  <p:cSld>
+    <p:spTree>
+      <p:nvGrpSpPr>
+        <p:cNvPr id="1" name=""/>
+        <p:cNvGrpSpPr/>
+        <p:nvPr/>
+      </p:nvGrpSpPr>
+      <p:grpSpPr/>
+      <p:sp>
+        <p:nvSpPr>
+          <p:cNvPr id="2" name="Rectangle 1"/>
+          <p:cNvSpPr/>
+          <p:nvPr/>
+        </p:nvSpPr>
+        <p:spPr>
+          <a:xfrm>
+            <a:off x="0" y="0"/>
+            <a:ext cx="12191695" cy="6858000"/>
+          </a:xfrm>
+          <a:prstGeom prst="rect">
+            <a:avLst/>
+          </a:prstGeom>
+          <a:solidFill>
+            <a:srgbClr val="0F172A"/>
+          </a:solidFill>
+          <a:ln>
+            <a:noFill/>
+          </a:ln>
+        </p:spPr>
+        <p:style>
+          <a:lnRef idx="1">
+            <a:schemeClr val="accent1"/>
+          </a:lnRef>
+          <a:fillRef idx="3">
+            <a:schemeClr val="accent1"/>
+          </a:fillRef>
+          <a:effectRef idx="2">
+            <a:schemeClr val="accent1"/>
+          </a:effectRef>
+          <a:fontRef idx="minor">
+            <a:schemeClr val="lt1"/>
+          </a:fontRef>
+        </p:style>
+        <p:txBody>
+          <a:bodyPr rtlCol="0" anchor="ctr"/>
+          <a:lstStyle/>
+          <a:p>
+            <a:pPr algn="ctr"/>
+          </a:p>
+        </p:txBody>
+      </p:sp>
+      <p:sp>
+        <p:nvSpPr>
+          <p:cNvPr id="3" name="TextBox 2"/>
+          <p:cNvSpPr txBox="1"/>
+          <p:nvPr/>
+        </p:nvSpPr>
+        <p:spPr>
+          <a:xfrm>
+            <a:off x="731520" y="365760"/>
+            <a:ext cx="10515600" cy="320040"/>
+          </a:xfrm>
+          <a:prstGeom prst="rect">
+            <a:avLst/>
+          </a:prstGeom>
+          <a:noFill/>
+        </p:spPr>
+        <p:txBody>
+          <a:bodyPr wrap="square">
+            <a:spAutoFit/>
+          </a:bodyPr>
+          <a:lstStyle/>
+          <a:p>
+            <a:pPr>
+              <a:defRPr sz="1000" b="1">
+                <a:solidFill>
+                  <a:srgbClr val="0EA5E9"/>
+                </a:solidFill>
+              </a:defRPr>
+            </a:pPr>
+            <a:r>
+              <a:t>14. TEAMWORK &amp; OWNERSHIP DIVISION</a:t>
+            </a:r>
+          </a:p>
+        </p:txBody>
+      </p:sp>
+      <p:sp>
+        <p:nvSpPr>
+          <p:cNvPr id="4" name="TextBox 3"/>
+          <p:cNvSpPr txBox="1"/>
+          <p:nvPr/>
+        </p:nvSpPr>
+        <p:spPr>
+          <a:xfrm>
+            <a:off x="731520" y="640080"/>
+            <a:ext cx="10515600" cy="640080"/>
+          </a:xfrm>
+          <a:prstGeom prst="rect">
+            <a:avLst/>
+          </a:prstGeom>
+          <a:noFill/>
+        </p:spPr>
+        <p:txBody>
+          <a:bodyPr wrap="square">
+            <a:spAutoFit/>
+          </a:bodyPr>
+          <a:lstStyle/>
+          <a:p>
+            <a:pPr>
+              <a:defRPr sz="2200" b="1">
+                <a:solidFill>
+                  <a:srgbClr val="F8FAFC"/>
+                </a:solidFill>
+              </a:defRPr>
+            </a:pPr>
+            <a:r>
+              <a:t>Interdisciplinary Team Structure &amp; Execution</a:t>
+            </a:r>
+          </a:p>
+        </p:txBody>
+      </p:sp>
+      <p:sp>
+        <p:nvSpPr>
+          <p:cNvPr id="5" name="Rounded Rectangle 4"/>
+          <p:cNvSpPr/>
+          <p:nvPr/>
+        </p:nvSpPr>
+        <p:spPr>
+          <a:xfrm>
+            <a:off x="731520" y="1463040"/>
+            <a:ext cx="5120640" cy="1143000"/>
+          </a:xfrm>
+          <a:prstGeom prst="roundRect">
+            <a:avLst/>
+          </a:prstGeom>
+          <a:solidFill>
+            <a:srgbClr val="1E293B"/>
+          </a:solidFill>
+          <a:ln w="19050">
+            <a:solidFill>
+              <a:srgbClr val="334155"/>
+            </a:solidFill>
+          </a:ln>
+        </p:spPr>
+        <p:style>
+          <a:lnRef idx="1">
+            <a:schemeClr val="accent1"/>
+          </a:lnRef>
+          <a:fillRef idx="3">
+            <a:schemeClr val="accent1"/>
+          </a:fillRef>
+          <a:effectRef idx="2">
+            <a:schemeClr val="accent1"/>
+          </a:effectRef>
+          <a:fontRef idx="minor">
+            <a:schemeClr val="lt1"/>
+          </a:fontRef>
+        </p:style>
+        <p:txBody>
+          <a:bodyPr rtlCol="0" anchor="ctr"/>
+          <a:lstStyle/>
+          <a:p>
+            <a:pPr algn="ctr"/>
+          </a:p>
+        </p:txBody>
+      </p:sp>
+      <p:sp>
+        <p:nvSpPr>
+          <p:cNvPr id="6" name="TextBox 5"/>
+          <p:cNvSpPr txBox="1"/>
+          <p:nvPr/>
+        </p:nvSpPr>
+        <p:spPr>
+          <a:xfrm>
+            <a:off x="914400" y="1600200"/>
+            <a:ext cx="4754879" cy="365760"/>
+          </a:xfrm>
+          <a:prstGeom prst="rect">
+            <a:avLst/>
+          </a:prstGeom>
+          <a:noFill/>
+        </p:spPr>
+        <p:txBody>
+          <a:bodyPr wrap="none">
+            <a:spAutoFit/>
+          </a:bodyPr>
+          <a:lstStyle/>
+          <a:p>
+            <a:pPr>
+              <a:defRPr sz="1300" b="1">
+                <a:solidFill>
+                  <a:srgbClr val="0EA5E9"/>
+                </a:solidFill>
+              </a:defRPr>
+            </a:pPr>
+            <a:r>
+              <a:t>Member 1: Clinical Product &amp; Problem Formulation</a:t>
+            </a:r>
+          </a:p>
+        </p:txBody>
+      </p:sp>
+      <p:sp>
+        <p:nvSpPr>
+          <p:cNvPr id="7" name="TextBox 6"/>
+          <p:cNvSpPr txBox="1"/>
+          <p:nvPr/>
+        </p:nvSpPr>
+        <p:spPr>
+          <a:xfrm>
+            <a:off x="868680" y="1874520"/>
+            <a:ext cx="4846320" cy="685800"/>
+          </a:xfrm>
+          <a:prstGeom prst="rect">
+            <a:avLst/>
+          </a:prstGeom>
+          <a:noFill/>
+        </p:spPr>
+        <p:txBody>
+          <a:bodyPr wrap="square">
+            <a:spAutoFit/>
+          </a:bodyPr>
+          <a:lstStyle/>
+          <a:p>
+            <a:pPr>
+              <a:defRPr sz="1050">
+                <a:solidFill>
+                  <a:srgbClr val="F8FAFC"/>
+                </a:solidFill>
+              </a:defRPr>
+            </a:pPr>
+            <a:r>
+              <a:t>Clinical workflow framing, operational capacity economics, and medical metric alignment.</a:t>
+            </a:r>
+          </a:p>
+        </p:txBody>
+      </p:sp>
+      <p:sp>
+        <p:nvSpPr>
+          <p:cNvPr id="8" name="Rounded Rectangle 7"/>
+          <p:cNvSpPr/>
+          <p:nvPr/>
+        </p:nvSpPr>
+        <p:spPr>
+          <a:xfrm>
+            <a:off x="6126480" y="1463040"/>
+            <a:ext cx="5120640" cy="1143000"/>
+          </a:xfrm>
+          <a:prstGeom prst="roundRect">
+            <a:avLst/>
+          </a:prstGeom>
+          <a:solidFill>
+            <a:srgbClr val="1E293B"/>
+          </a:solidFill>
+          <a:ln w="19050">
+            <a:solidFill>
+              <a:srgbClr val="334155"/>
+            </a:solidFill>
+          </a:ln>
+        </p:spPr>
+        <p:style>
+          <a:lnRef idx="1">
+            <a:schemeClr val="accent1"/>
+          </a:lnRef>
+          <a:fillRef idx="3">
+            <a:schemeClr val="accent1"/>
+          </a:fillRef>
+          <a:effectRef idx="2">
+            <a:schemeClr val="accent1"/>
+          </a:effectRef>
+          <a:fontRef idx="minor">
+            <a:schemeClr val="lt1"/>
+          </a:fontRef>
+        </p:style>
+        <p:txBody>
+          <a:bodyPr rtlCol="0" anchor="ctr"/>
+          <a:lstStyle/>
+          <a:p>
+            <a:pPr algn="ctr"/>
+          </a:p>
+        </p:txBody>
+      </p:sp>
+      <p:sp>
+        <p:nvSpPr>
+          <p:cNvPr id="9" name="TextBox 8"/>
+          <p:cNvSpPr txBox="1"/>
+          <p:nvPr/>
+        </p:nvSpPr>
+        <p:spPr>
+          <a:xfrm>
+            <a:off x="6309360" y="1600200"/>
+            <a:ext cx="4754879" cy="365760"/>
+          </a:xfrm>
+          <a:prstGeom prst="rect">
+            <a:avLst/>
+          </a:prstGeom>
+          <a:noFill/>
+        </p:spPr>
+        <p:txBody>
+          <a:bodyPr wrap="none">
+            <a:spAutoFit/>
+          </a:bodyPr>
+          <a:lstStyle/>
+          <a:p>
+            <a:pPr>
+              <a:defRPr sz="1300" b="1">
+                <a:solidFill>
+                  <a:srgbClr val="0EA5E9"/>
+                </a:solidFill>
+              </a:defRPr>
+            </a:pPr>
+            <a:r>
+              <a:t>Member 2: Data Engineering &amp; Leakage Isolation</a:t>
+            </a:r>
+          </a:p>
+        </p:txBody>
+      </p:sp>
+      <p:sp>
+        <p:nvSpPr>
+          <p:cNvPr id="10" name="TextBox 9"/>
+          <p:cNvSpPr txBox="1"/>
+          <p:nvPr/>
+        </p:nvSpPr>
+        <p:spPr>
+          <a:xfrm>
+            <a:off x="6263640" y="1874520"/>
+            <a:ext cx="4846320" cy="685800"/>
+          </a:xfrm>
+          <a:prstGeom prst="rect">
+            <a:avLst/>
+          </a:prstGeom>
+          <a:noFill/>
+        </p:spPr>
+        <p:txBody>
+          <a:bodyPr wrap="square">
+            <a:spAutoFit/>
+          </a:bodyPr>
+          <a:lstStyle/>
+          <a:p>
+            <a:pPr>
+              <a:defRPr sz="1050">
+                <a:solidFill>
+                  <a:srgbClr val="F8FAFC"/>
+                </a:solidFill>
+              </a:defRPr>
+            </a:pPr>
+            <a:r>
+              <a:t>Grouped patient hash splitting, UCI data pipeline, and zero-leakage mathematical guarantees.</a:t>
+            </a:r>
+          </a:p>
+        </p:txBody>
+      </p:sp>
+      <p:sp>
+        <p:nvSpPr>
+          <p:cNvPr id="11" name="Rounded Rectangle 10"/>
+          <p:cNvSpPr/>
+          <p:nvPr/>
+        </p:nvSpPr>
+        <p:spPr>
+          <a:xfrm>
+            <a:off x="731520" y="2697480"/>
+            <a:ext cx="5120640" cy="1143000"/>
+          </a:xfrm>
+          <a:prstGeom prst="roundRect">
+            <a:avLst/>
+          </a:prstGeom>
+          <a:solidFill>
+            <a:srgbClr val="1E293B"/>
+          </a:solidFill>
+          <a:ln w="19050">
+            <a:solidFill>
+              <a:srgbClr val="334155"/>
+            </a:solidFill>
+          </a:ln>
+        </p:spPr>
+        <p:style>
+          <a:lnRef idx="1">
+            <a:schemeClr val="accent1"/>
+          </a:lnRef>
+          <a:fillRef idx="3">
+            <a:schemeClr val="accent1"/>
+          </a:fillRef>
+          <a:effectRef idx="2">
+            <a:schemeClr val="accent1"/>
+          </a:effectRef>
+          <a:fontRef idx="minor">
+            <a:schemeClr val="lt1"/>
+          </a:fontRef>
+        </p:style>
+        <p:txBody>
+          <a:bodyPr rtlCol="0" anchor="ctr"/>
+          <a:lstStyle/>
+          <a:p>
+            <a:pPr algn="ctr"/>
+          </a:p>
+        </p:txBody>
+      </p:sp>
+      <p:sp>
+        <p:nvSpPr>
+          <p:cNvPr id="12" name="TextBox 11"/>
+          <p:cNvSpPr txBox="1"/>
+          <p:nvPr/>
+        </p:nvSpPr>
+        <p:spPr>
+          <a:xfrm>
+            <a:off x="914400" y="2834640"/>
+            <a:ext cx="4754879" cy="365760"/>
+          </a:xfrm>
+          <a:prstGeom prst="rect">
+            <a:avLst/>
+          </a:prstGeom>
+          <a:noFill/>
+        </p:spPr>
+        <p:txBody>
+          <a:bodyPr wrap="none">
+            <a:spAutoFit/>
+          </a:bodyPr>
+          <a:lstStyle/>
+          <a:p>
+            <a:pPr>
+              <a:defRPr sz="1300" b="1">
+                <a:solidFill>
+                  <a:srgbClr val="0EA5E9"/>
+                </a:solidFill>
+              </a:defRPr>
+            </a:pPr>
+            <a:r>
+              <a:t>Member 3: Machine Learning &amp; Probability Calibration</a:t>
+            </a:r>
+          </a:p>
+        </p:txBody>
+      </p:sp>
+      <p:sp>
+        <p:nvSpPr>
+          <p:cNvPr id="13" name="TextBox 12"/>
+          <p:cNvSpPr txBox="1"/>
+          <p:nvPr/>
+        </p:nvSpPr>
+        <p:spPr>
+          <a:xfrm>
+            <a:off x="868680" y="3108960"/>
+            <a:ext cx="4846320" cy="685800"/>
+          </a:xfrm>
+          <a:prstGeom prst="rect">
+            <a:avLst/>
+          </a:prstGeom>
+          <a:noFill/>
+        </p:spPr>
+        <p:txBody>
+          <a:bodyPr wrap="square">
+            <a:spAutoFit/>
+          </a:bodyPr>
+          <a:lstStyle/>
+          <a:p>
+            <a:pPr>
+              <a:defRPr sz="1050">
+                <a:solidFill>
+                  <a:srgbClr val="F8FAFC"/>
+                </a:solidFill>
+              </a:defRPr>
+            </a:pPr>
+            <a:r>
+              <a:t>Algorithm benchmarking, LightGBM tuning, Isotonic calibration, and 95% bootstrap CIs.</a:t>
+            </a:r>
+          </a:p>
+        </p:txBody>
+      </p:sp>
+      <p:sp>
+        <p:nvSpPr>
+          <p:cNvPr id="14" name="Rounded Rectangle 13"/>
+          <p:cNvSpPr/>
+          <p:nvPr/>
+        </p:nvSpPr>
+        <p:spPr>
+          <a:xfrm>
+            <a:off x="6126480" y="2697480"/>
+            <a:ext cx="5120640" cy="1143000"/>
+          </a:xfrm>
+          <a:prstGeom prst="roundRect">
+            <a:avLst/>
+          </a:prstGeom>
+          <a:solidFill>
+            <a:srgbClr val="1E293B"/>
+          </a:solidFill>
+          <a:ln w="19050">
+            <a:solidFill>
+              <a:srgbClr val="334155"/>
+            </a:solidFill>
+          </a:ln>
+        </p:spPr>
+        <p:style>
+          <a:lnRef idx="1">
+            <a:schemeClr val="accent1"/>
+          </a:lnRef>
+          <a:fillRef idx="3">
+            <a:schemeClr val="accent1"/>
+          </a:fillRef>
+          <a:effectRef idx="2">
+            <a:schemeClr val="accent1"/>
+          </a:effectRef>
+          <a:fontRef idx="minor">
+            <a:schemeClr val="lt1"/>
+          </a:fontRef>
+        </p:style>
+        <p:txBody>
+          <a:bodyPr rtlCol="0" anchor="ctr"/>
+          <a:lstStyle/>
+          <a:p>
+            <a:pPr algn="ctr"/>
+          </a:p>
+        </p:txBody>
+      </p:sp>
+      <p:sp>
+        <p:nvSpPr>
+          <p:cNvPr id="15" name="TextBox 14"/>
+          <p:cNvSpPr txBox="1"/>
+          <p:nvPr/>
+        </p:nvSpPr>
+        <p:spPr>
+          <a:xfrm>
+            <a:off x="6309360" y="2834640"/>
+            <a:ext cx="4754879" cy="365760"/>
+          </a:xfrm>
+          <a:prstGeom prst="rect">
+            <a:avLst/>
+          </a:prstGeom>
+          <a:noFill/>
+        </p:spPr>
+        <p:txBody>
+          <a:bodyPr wrap="none">
+            <a:spAutoFit/>
+          </a:bodyPr>
+          <a:lstStyle/>
+          <a:p>
+            <a:pPr>
+              <a:defRPr sz="1300" b="1">
+                <a:solidFill>
+                  <a:srgbClr val="0EA5E9"/>
+                </a:solidFill>
+              </a:defRPr>
+            </a:pPr>
+            <a:r>
+              <a:t>Member 4: Structured RAG &amp; Precedent Retrieval</a:t>
+            </a:r>
+          </a:p>
+        </p:txBody>
+      </p:sp>
+      <p:sp>
+        <p:nvSpPr>
+          <p:cNvPr id="16" name="TextBox 15"/>
+          <p:cNvSpPr txBox="1"/>
+          <p:nvPr/>
+        </p:nvSpPr>
+        <p:spPr>
+          <a:xfrm>
+            <a:off x="6263640" y="3108960"/>
+            <a:ext cx="4846320" cy="685800"/>
+          </a:xfrm>
+          <a:prstGeom prst="rect">
+            <a:avLst/>
+          </a:prstGeom>
+          <a:noFill/>
+        </p:spPr>
+        <p:txBody>
+          <a:bodyPr wrap="square">
+            <a:spAutoFit/>
+          </a:bodyPr>
+          <a:lstStyle/>
+          <a:p>
+            <a:pPr>
+              <a:defRPr sz="1050">
+                <a:solidFill>
+                  <a:srgbClr val="F8FAFC"/>
+                </a:solidFill>
+              </a:defRPr>
+            </a:pPr>
+            <a:r>
+              <a:t>64-dim clinical latent SVD space, FAISS inner-product indexing, and OOF cross-validation.</a:t>
+            </a:r>
+          </a:p>
+        </p:txBody>
+      </p:sp>
+      <p:sp>
+        <p:nvSpPr>
+          <p:cNvPr id="17" name="Rounded Rectangle 16"/>
+          <p:cNvSpPr/>
+          <p:nvPr/>
+        </p:nvSpPr>
+        <p:spPr>
+          <a:xfrm>
+            <a:off x="731520" y="3931920"/>
+            <a:ext cx="5120640" cy="1143000"/>
+          </a:xfrm>
+          <a:prstGeom prst="roundRect">
+            <a:avLst/>
+          </a:prstGeom>
+          <a:solidFill>
+            <a:srgbClr val="1E293B"/>
+          </a:solidFill>
+          <a:ln w="19050">
+            <a:solidFill>
+              <a:srgbClr val="334155"/>
+            </a:solidFill>
+          </a:ln>
+        </p:spPr>
+        <p:style>
+          <a:lnRef idx="1">
+            <a:schemeClr val="accent1"/>
+          </a:lnRef>
+          <a:fillRef idx="3">
+            <a:schemeClr val="accent1"/>
+          </a:fillRef>
+          <a:effectRef idx="2">
+            <a:schemeClr val="accent1"/>
+          </a:effectRef>
+          <a:fontRef idx="minor">
+            <a:schemeClr val="lt1"/>
+          </a:fontRef>
+        </p:style>
+        <p:txBody>
+          <a:bodyPr rtlCol="0" anchor="ctr"/>
+          <a:lstStyle/>
+          <a:p>
+            <a:pPr algn="ctr"/>
+          </a:p>
+        </p:txBody>
+      </p:sp>
+      <p:sp>
+        <p:nvSpPr>
+          <p:cNvPr id="18" name="TextBox 17"/>
+          <p:cNvSpPr txBox="1"/>
+          <p:nvPr/>
+        </p:nvSpPr>
+        <p:spPr>
+          <a:xfrm>
+            <a:off x="914400" y="4069080"/>
+            <a:ext cx="4754879" cy="365760"/>
+          </a:xfrm>
+          <a:prstGeom prst="rect">
+            <a:avLst/>
+          </a:prstGeom>
+          <a:noFill/>
+        </p:spPr>
+        <p:txBody>
+          <a:bodyPr wrap="none">
+            <a:spAutoFit/>
+          </a:bodyPr>
+          <a:lstStyle/>
+          <a:p>
+            <a:pPr>
+              <a:defRPr sz="1300" b="1">
+                <a:solidFill>
+                  <a:srgbClr val="0EA5E9"/>
+                </a:solidFill>
+              </a:defRPr>
+            </a:pPr>
+            <a:r>
+              <a:t>Member 5: Explainability, Fairness &amp; Governance</a:t>
+            </a:r>
+          </a:p>
+        </p:txBody>
+      </p:sp>
+      <p:sp>
+        <p:nvSpPr>
+          <p:cNvPr id="19" name="TextBox 18"/>
+          <p:cNvSpPr txBox="1"/>
+          <p:nvPr/>
+        </p:nvSpPr>
+        <p:spPr>
+          <a:xfrm>
+            <a:off x="868680" y="4343400"/>
+            <a:ext cx="4846320" cy="685800"/>
+          </a:xfrm>
+          <a:prstGeom prst="rect">
+            <a:avLst/>
+          </a:prstGeom>
+          <a:noFill/>
+        </p:spPr>
+        <p:txBody>
+          <a:bodyPr wrap="square">
+            <a:spAutoFit/>
+          </a:bodyPr>
+          <a:lstStyle/>
+          <a:p>
+            <a:pPr>
+              <a:defRPr sz="1050">
+                <a:solidFill>
+                  <a:srgbClr val="F8FAFC"/>
+                </a:solidFill>
+              </a:defRPr>
+            </a:pPr>
+            <a:r>
+              <a:t>TreeSHAP local attributions, demographic-blinded model audit, and 42-feature PSI monitoring.</a:t>
+            </a:r>
+          </a:p>
+        </p:txBody>
+      </p:sp>
+      <p:sp>
+        <p:nvSpPr>
+          <p:cNvPr id="20" name="Rounded Rectangle 19"/>
+          <p:cNvSpPr/>
+          <p:nvPr/>
+        </p:nvSpPr>
+        <p:spPr>
+          <a:xfrm>
+            <a:off x="6126480" y="3931920"/>
+            <a:ext cx="5120640" cy="1143000"/>
+          </a:xfrm>
+          <a:prstGeom prst="roundRect">
+            <a:avLst/>
+          </a:prstGeom>
+          <a:solidFill>
+            <a:srgbClr val="1E293B"/>
+          </a:solidFill>
+          <a:ln w="19050">
+            <a:solidFill>
+              <a:srgbClr val="334155"/>
+            </a:solidFill>
+          </a:ln>
+        </p:spPr>
+        <p:style>
+          <a:lnRef idx="1">
+            <a:schemeClr val="accent1"/>
+          </a:lnRef>
+          <a:fillRef idx="3">
+            <a:schemeClr val="accent1"/>
+          </a:fillRef>
+          <a:effectRef idx="2">
+            <a:schemeClr val="accent1"/>
+          </a:effectRef>
+          <a:fontRef idx="minor">
+            <a:schemeClr val="lt1"/>
+          </a:fontRef>
+        </p:style>
+        <p:txBody>
+          <a:bodyPr rtlCol="0" anchor="ctr"/>
+          <a:lstStyle/>
+          <a:p>
+            <a:pPr algn="ctr"/>
+          </a:p>
+        </p:txBody>
+      </p:sp>
+      <p:sp>
+        <p:nvSpPr>
+          <p:cNvPr id="21" name="TextBox 20"/>
+          <p:cNvSpPr txBox="1"/>
+          <p:nvPr/>
+        </p:nvSpPr>
+        <p:spPr>
+          <a:xfrm>
+            <a:off x="6309360" y="4069080"/>
+            <a:ext cx="4754879" cy="365760"/>
+          </a:xfrm>
+          <a:prstGeom prst="rect">
+            <a:avLst/>
+          </a:prstGeom>
+          <a:noFill/>
+        </p:spPr>
+        <p:txBody>
+          <a:bodyPr wrap="none">
+            <a:spAutoFit/>
+          </a:bodyPr>
+          <a:lstStyle/>
+          <a:p>
+            <a:pPr>
+              <a:defRPr sz="1300" b="1">
+                <a:solidFill>
+                  <a:srgbClr val="0EA5E9"/>
+                </a:solidFill>
+              </a:defRPr>
+            </a:pPr>
+            <a:r>
+              <a:t>Member 6: Full-Stack Web Command Center</a:t>
+            </a:r>
+          </a:p>
+        </p:txBody>
+      </p:sp>
+      <p:sp>
+        <p:nvSpPr>
+          <p:cNvPr id="22" name="TextBox 21"/>
+          <p:cNvSpPr txBox="1"/>
+          <p:nvPr/>
+        </p:nvSpPr>
+        <p:spPr>
+          <a:xfrm>
+            <a:off x="6263640" y="4343400"/>
+            <a:ext cx="4846320" cy="685800"/>
+          </a:xfrm>
+          <a:prstGeom prst="rect">
+            <a:avLst/>
+          </a:prstGeom>
+          <a:noFill/>
+        </p:spPr>
+        <p:txBody>
+          <a:bodyPr wrap="square">
+            <a:spAutoFit/>
+          </a:bodyPr>
+          <a:lstStyle/>
+          <a:p>
+            <a:pPr>
+              <a:defRPr sz="1050">
+                <a:solidFill>
+                  <a:srgbClr val="F8FAFC"/>
+                </a:solidFill>
+              </a:defRPr>
+            </a:pPr>
+            <a:r>
+              <a:t>React 19 + TypeScript + Vite SPA, responsive clinical design tokens, and interactive ROI simulator.</a:t>
+            </a:r>
+          </a:p>
+        </p:txBody>
+      </p:sp>
+      <p:sp>
+        <p:nvSpPr>
+          <p:cNvPr id="23" name="Rounded Rectangle 22"/>
+          <p:cNvSpPr/>
+          <p:nvPr/>
+        </p:nvSpPr>
+        <p:spPr>
+          <a:xfrm>
+            <a:off x="731520" y="5166360"/>
+            <a:ext cx="5120640" cy="1143000"/>
+          </a:xfrm>
+          <a:prstGeom prst="roundRect">
+            <a:avLst/>
+          </a:prstGeom>
+          <a:solidFill>
+            <a:srgbClr val="1E293B"/>
+          </a:solidFill>
+          <a:ln w="19050">
+            <a:solidFill>
+              <a:srgbClr val="334155"/>
+            </a:solidFill>
+          </a:ln>
+        </p:spPr>
+        <p:style>
+          <a:lnRef idx="1">
+            <a:schemeClr val="accent1"/>
+          </a:lnRef>
+          <a:fillRef idx="3">
+            <a:schemeClr val="accent1"/>
+          </a:fillRef>
+          <a:effectRef idx="2">
+            <a:schemeClr val="accent1"/>
+          </a:effectRef>
+          <a:fontRef idx="minor">
+            <a:schemeClr val="lt1"/>
+          </a:fontRef>
+        </p:style>
+        <p:txBody>
+          <a:bodyPr rtlCol="0" anchor="ctr"/>
+          <a:lstStyle/>
+          <a:p>
+            <a:pPr algn="ctr"/>
+          </a:p>
+        </p:txBody>
+      </p:sp>
+      <p:sp>
+        <p:nvSpPr>
+          <p:cNvPr id="24" name="TextBox 23"/>
+          <p:cNvSpPr txBox="1"/>
+          <p:nvPr/>
+        </p:nvSpPr>
+        <p:spPr>
+          <a:xfrm>
+            <a:off x="914400" y="5303520"/>
+            <a:ext cx="4754879" cy="365760"/>
+          </a:xfrm>
+          <a:prstGeom prst="rect">
+            <a:avLst/>
+          </a:prstGeom>
+          <a:noFill/>
+        </p:spPr>
+        <p:txBody>
+          <a:bodyPr wrap="none">
+            <a:spAutoFit/>
+          </a:bodyPr>
+          <a:lstStyle/>
+          <a:p>
+            <a:pPr>
+              <a:defRPr sz="1300" b="1">
+                <a:solidFill>
+                  <a:srgbClr val="0EA5E9"/>
+                </a:solidFill>
+              </a:defRPr>
+            </a:pPr>
+            <a:r>
+              <a:t>Member 7: Production DevOps &amp; Container Serving</a:t>
+            </a:r>
+          </a:p>
+        </p:txBody>
+      </p:sp>
+      <p:sp>
+        <p:nvSpPr>
+          <p:cNvPr id="25" name="TextBox 24"/>
+          <p:cNvSpPr txBox="1"/>
+          <p:nvPr/>
+        </p:nvSpPr>
+        <p:spPr>
+          <a:xfrm>
+            <a:off x="868680" y="5577840"/>
+            <a:ext cx="4846320" cy="685800"/>
+          </a:xfrm>
+          <a:prstGeom prst="rect">
+            <a:avLst/>
+          </a:prstGeom>
+          <a:noFill/>
+        </p:spPr>
+        <p:txBody>
+          <a:bodyPr wrap="square">
+            <a:spAutoFit/>
+          </a:bodyPr>
+          <a:lstStyle/>
+          <a:p>
+            <a:pPr>
+              <a:defRPr sz="1050">
+                <a:solidFill>
+                  <a:srgbClr val="F8FAFC"/>
+                </a:solidFill>
+              </a:defRPr>
+            </a:pPr>
+            <a:r>
+              <a:t>FastAPI architecture, Lite serving mode (&lt;2MB), Docker multi-stage builds, and CI/CD automation.</a:t>
+            </a:r>
+          </a:p>
+        </p:txBody>
+      </p:sp>
+    </p:spTree>
+  </p:cSld>
+  <p:clrMapOvr>
+    <a:masterClrMapping/>
+  </p:clrMapOvr>
+</p:sld>
+</file>
+
+<file path=ppt/slides/slide18.xml><?xml version="1.0" encoding="utf-8"?>
+<p:sld xmlns:a="http://schemas.openxmlformats.org/drawingml/2006/main" xmlns:p="http://schemas.openxmlformats.org/presentationml/2006/main" xmlns:r="http://schemas.openxmlformats.org/officeDocument/2006/relationships">
+  <p:cSld>
+    <p:spTree>
+      <p:nvGrpSpPr>
+        <p:cNvPr id="1" name=""/>
+        <p:cNvGrpSpPr/>
+        <p:nvPr/>
+      </p:nvGrpSpPr>
+      <p:grpSpPr/>
+      <p:sp>
+        <p:nvSpPr>
+          <p:cNvPr id="2" name="Rectangle 1"/>
+          <p:cNvSpPr/>
+          <p:nvPr/>
+        </p:nvSpPr>
+        <p:spPr>
+          <a:xfrm>
+            <a:off x="0" y="0"/>
+            <a:ext cx="12191695" cy="6858000"/>
+          </a:xfrm>
+          <a:prstGeom prst="rect">
+            <a:avLst/>
+          </a:prstGeom>
+          <a:solidFill>
+            <a:srgbClr val="0F172A"/>
+          </a:solidFill>
+          <a:ln>
+            <a:noFill/>
+          </a:ln>
+        </p:spPr>
+        <p:style>
+          <a:lnRef idx="1">
+            <a:schemeClr val="accent1"/>
+          </a:lnRef>
+          <a:fillRef idx="3">
+            <a:schemeClr val="accent1"/>
+          </a:fillRef>
+          <a:effectRef idx="2">
+            <a:schemeClr val="accent1"/>
+          </a:effectRef>
+          <a:fontRef idx="minor">
+            <a:schemeClr val="lt1"/>
+          </a:fontRef>
+        </p:style>
+        <p:txBody>
+          <a:bodyPr rtlCol="0" anchor="ctr"/>
+          <a:lstStyle/>
+          <a:p>
+            <a:pPr algn="ctr"/>
+          </a:p>
+        </p:txBody>
+      </p:sp>
+      <p:sp>
+        <p:nvSpPr>
+          <p:cNvPr id="3" name="TextBox 2"/>
+          <p:cNvSpPr txBox="1"/>
+          <p:nvPr/>
+        </p:nvSpPr>
+        <p:spPr>
+          <a:xfrm>
+            <a:off x="731520" y="365760"/>
+            <a:ext cx="10515600" cy="320040"/>
+          </a:xfrm>
+          <a:prstGeom prst="rect">
+            <a:avLst/>
+          </a:prstGeom>
+          <a:noFill/>
+        </p:spPr>
+        <p:txBody>
+          <a:bodyPr wrap="square">
+            <a:spAutoFit/>
+          </a:bodyPr>
+          <a:lstStyle/>
+          <a:p>
+            <a:pPr>
+              <a:defRPr sz="1000" b="1">
+                <a:solidFill>
+                  <a:srgbClr val="0EA5E9"/>
+                </a:solidFill>
+              </a:defRPr>
+            </a:pPr>
+            <a:r>
+              <a:t>15. PRODUCTION ROADMAP &amp; NEXT STEPS</a:t>
             </a:r>
           </a:p>
         </p:txBody>
